--- a/bp/母版模板.pptx
+++ b/bp/母版模板.pptx
@@ -1,17 +1,17 @@
 
 <file path=ppt/presentation.xml><?xml version="1.0" encoding="utf-8"?>
-<p:presentation xmlns:a="http://schemas.openxmlformats.org/drawingml/2006/main" xmlns:r="http://schemas.openxmlformats.org/officeDocument/2006/relationships" xmlns:p="http://schemas.openxmlformats.org/presentationml/2006/main" saveSubsetFonts="1" autoCompressPictures="0">
+<p:presentation xmlns:a="http://schemas.openxmlformats.org/drawingml/2006/main" xmlns:r="http://schemas.openxmlformats.org/officeDocument/2006/relationships" xmlns:p="http://schemas.openxmlformats.org/presentationml/2006/main" autoCompressPictures="0">
   <p:sldMasterIdLst>
     <p:sldMasterId id="2147483648" r:id="rId1"/>
   </p:sldMasterIdLst>
   <p:sldIdLst>
-    <p:sldId id="256" r:id="rId7"/>
-    <p:sldId id="257" r:id="rId8"/>
-    <p:sldId id="258" r:id="rId9"/>
-    <p:sldId id="259" r:id="rId10"/>
-    <p:sldId id="260" r:id="rId11"/>
+    <p:sldId id="256" r:id="rId3"/>
+    <p:sldId id="257" r:id="rId4"/>
+    <p:sldId id="258" r:id="rId5"/>
+    <p:sldId id="259" r:id="rId6"/>
+    <p:sldId id="260" r:id="rId7"/>
   </p:sldIdLst>
-  <p:sldSz cx="12191695" cy="6858000" type="screen4x3"/>
+  <p:sldSz cx="12191365" cy="6858000" type="screen4x3"/>
   <p:notesSz cx="6858000" cy="9144000"/>
   <p:defaultTextStyle>
     <a:defPPr>
@@ -108,6 +108,22 @@
       </a:defRPr>
     </a:lvl9pPr>
   </p:defaultTextStyle>
+  <p:extLst>
+    <p:ext uri="{EFAFB233-063F-42B5-8137-9DF3F51BA10A}">
+      <p15:sldGuideLst xmlns:p15="http://schemas.microsoft.com/office/powerpoint/2012/main">
+        <p15:guide id="1" orient="horz" pos="2160" userDrawn="1">
+          <p15:clr>
+            <a:srgbClr val="A4A3A4"/>
+          </p15:clr>
+        </p15:guide>
+        <p15:guide id="2" pos="2880" userDrawn="1">
+          <p15:clr>
+            <a:srgbClr val="A4A3A4"/>
+          </p15:clr>
+        </p15:guide>
+      </p15:sldGuideLst>
+    </p:ext>
+  </p:extLst>
 </p:presentation>
 </file>
 
@@ -292,7 +308,6 @@
           <a:p>
             <a:fld id="{5BCAD085-E8A6-8845-BD4E-CB4CCA059FC4}" type="datetimeFigureOut">
               <a:rPr lang="en-US" smtClean="0"/>
-              <a:t>1/27/13</a:t>
             </a:fld>
             <a:endParaRPr lang="en-US"/>
           </a:p>
@@ -334,18 +349,12 @@
           <a:p>
             <a:fld id="{C1FF6DA9-008F-8B48-92A6-B652298478BF}" type="slidenum">
               <a:rPr lang="en-US" smtClean="0"/>
-              <a:t>‹#›</a:t>
             </a:fld>
             <a:endParaRPr lang="en-US"/>
           </a:p>
         </p:txBody>
       </p:sp>
     </p:spTree>
-    <p:extLst>
-      <p:ext uri="{BB962C8B-B14F-4D97-AF65-F5344CB8AC3E}">
-        <p14:creationId xmlns:p14="http://schemas.microsoft.com/office/powerpoint/2010/main" val="3168075583"/>
-      </p:ext>
-    </p:extLst>
   </p:cSld>
   <p:clrMapOvr>
     <a:masterClrMapping/>
@@ -413,6 +422,7 @@
               <a:rPr lang="en-US" smtClean="0"/>
               <a:t>Click to edit Master text styles</a:t>
             </a:r>
+            <a:endParaRPr lang="en-US" smtClean="0"/>
           </a:p>
           <a:p>
             <a:pPr lvl="1"/>
@@ -420,6 +430,7 @@
               <a:rPr lang="en-US" smtClean="0"/>
               <a:t>Second level</a:t>
             </a:r>
+            <a:endParaRPr lang="en-US" smtClean="0"/>
           </a:p>
           <a:p>
             <a:pPr lvl="2"/>
@@ -427,6 +438,7 @@
               <a:rPr lang="en-US" smtClean="0"/>
               <a:t>Third level</a:t>
             </a:r>
+            <a:endParaRPr lang="en-US" smtClean="0"/>
           </a:p>
           <a:p>
             <a:pPr lvl="3"/>
@@ -434,6 +446,7 @@
               <a:rPr lang="en-US" smtClean="0"/>
               <a:t>Fourth level</a:t>
             </a:r>
+            <a:endParaRPr lang="en-US" smtClean="0"/>
           </a:p>
           <a:p>
             <a:pPr lvl="4"/>
@@ -462,7 +475,6 @@
           <a:p>
             <a:fld id="{5BCAD085-E8A6-8845-BD4E-CB4CCA059FC4}" type="datetimeFigureOut">
               <a:rPr lang="en-US" smtClean="0"/>
-              <a:t>1/27/13</a:t>
             </a:fld>
             <a:endParaRPr lang="en-US"/>
           </a:p>
@@ -504,18 +516,12 @@
           <a:p>
             <a:fld id="{C1FF6DA9-008F-8B48-92A6-B652298478BF}" type="slidenum">
               <a:rPr lang="en-US" smtClean="0"/>
-              <a:t>‹#›</a:t>
             </a:fld>
             <a:endParaRPr lang="en-US"/>
           </a:p>
         </p:txBody>
       </p:sp>
     </p:spTree>
-    <p:extLst>
-      <p:ext uri="{BB962C8B-B14F-4D97-AF65-F5344CB8AC3E}">
-        <p14:creationId xmlns:p14="http://schemas.microsoft.com/office/powerpoint/2010/main" val="2910927964"/>
-      </p:ext>
-    </p:extLst>
   </p:cSld>
   <p:clrMapOvr>
     <a:masterClrMapping/>
@@ -593,6 +599,7 @@
               <a:rPr lang="en-US" smtClean="0"/>
               <a:t>Click to edit Master text styles</a:t>
             </a:r>
+            <a:endParaRPr lang="en-US" smtClean="0"/>
           </a:p>
           <a:p>
             <a:pPr lvl="1"/>
@@ -600,6 +607,7 @@
               <a:rPr lang="en-US" smtClean="0"/>
               <a:t>Second level</a:t>
             </a:r>
+            <a:endParaRPr lang="en-US" smtClean="0"/>
           </a:p>
           <a:p>
             <a:pPr lvl="2"/>
@@ -607,6 +615,7 @@
               <a:rPr lang="en-US" smtClean="0"/>
               <a:t>Third level</a:t>
             </a:r>
+            <a:endParaRPr lang="en-US" smtClean="0"/>
           </a:p>
           <a:p>
             <a:pPr lvl="3"/>
@@ -614,6 +623,7 @@
               <a:rPr lang="en-US" smtClean="0"/>
               <a:t>Fourth level</a:t>
             </a:r>
+            <a:endParaRPr lang="en-US" smtClean="0"/>
           </a:p>
           <a:p>
             <a:pPr lvl="4"/>
@@ -642,7 +652,6 @@
           <a:p>
             <a:fld id="{5BCAD085-E8A6-8845-BD4E-CB4CCA059FC4}" type="datetimeFigureOut">
               <a:rPr lang="en-US" smtClean="0"/>
-              <a:t>1/27/13</a:t>
             </a:fld>
             <a:endParaRPr lang="en-US"/>
           </a:p>
@@ -684,18 +693,12 @@
           <a:p>
             <a:fld id="{C1FF6DA9-008F-8B48-92A6-B652298478BF}" type="slidenum">
               <a:rPr lang="en-US" smtClean="0"/>
-              <a:t>‹#›</a:t>
             </a:fld>
             <a:endParaRPr lang="en-US"/>
           </a:p>
         </p:txBody>
       </p:sp>
     </p:spTree>
-    <p:extLst>
-      <p:ext uri="{BB962C8B-B14F-4D97-AF65-F5344CB8AC3E}">
-        <p14:creationId xmlns:p14="http://schemas.microsoft.com/office/powerpoint/2010/main" val="3612223792"/>
-      </p:ext>
-    </p:extLst>
   </p:cSld>
   <p:clrMapOvr>
     <a:masterClrMapping/>
@@ -763,6 +766,7 @@
               <a:rPr lang="en-US" smtClean="0"/>
               <a:t>Click to edit Master text styles</a:t>
             </a:r>
+            <a:endParaRPr lang="en-US" smtClean="0"/>
           </a:p>
           <a:p>
             <a:pPr lvl="1"/>
@@ -770,6 +774,7 @@
               <a:rPr lang="en-US" smtClean="0"/>
               <a:t>Second level</a:t>
             </a:r>
+            <a:endParaRPr lang="en-US" smtClean="0"/>
           </a:p>
           <a:p>
             <a:pPr lvl="2"/>
@@ -777,6 +782,7 @@
               <a:rPr lang="en-US" smtClean="0"/>
               <a:t>Third level</a:t>
             </a:r>
+            <a:endParaRPr lang="en-US" smtClean="0"/>
           </a:p>
           <a:p>
             <a:pPr lvl="3"/>
@@ -784,6 +790,7 @@
               <a:rPr lang="en-US" smtClean="0"/>
               <a:t>Fourth level</a:t>
             </a:r>
+            <a:endParaRPr lang="en-US" smtClean="0"/>
           </a:p>
           <a:p>
             <a:pPr lvl="4"/>
@@ -812,7 +819,6 @@
           <a:p>
             <a:fld id="{5BCAD085-E8A6-8845-BD4E-CB4CCA059FC4}" type="datetimeFigureOut">
               <a:rPr lang="en-US" smtClean="0"/>
-              <a:t>1/27/13</a:t>
             </a:fld>
             <a:endParaRPr lang="en-US"/>
           </a:p>
@@ -854,18 +860,12 @@
           <a:p>
             <a:fld id="{C1FF6DA9-008F-8B48-92A6-B652298478BF}" type="slidenum">
               <a:rPr lang="en-US" smtClean="0"/>
-              <a:t>‹#›</a:t>
             </a:fld>
             <a:endParaRPr lang="en-US"/>
           </a:p>
         </p:txBody>
       </p:sp>
     </p:spTree>
-    <p:extLst>
-      <p:ext uri="{BB962C8B-B14F-4D97-AF65-F5344CB8AC3E}">
-        <p14:creationId xmlns:p14="http://schemas.microsoft.com/office/powerpoint/2010/main" val="2614314258"/>
-      </p:ext>
-    </p:extLst>
   </p:cSld>
   <p:clrMapOvr>
     <a:masterClrMapping/>
@@ -1038,6 +1038,7 @@
               <a:rPr lang="en-US" smtClean="0"/>
               <a:t>Click to edit Master text styles</a:t>
             </a:r>
+            <a:endParaRPr lang="en-US" smtClean="0"/>
           </a:p>
         </p:txBody>
       </p:sp>
@@ -1058,7 +1059,6 @@
           <a:p>
             <a:fld id="{5BCAD085-E8A6-8845-BD4E-CB4CCA059FC4}" type="datetimeFigureOut">
               <a:rPr lang="en-US" smtClean="0"/>
-              <a:t>1/27/13</a:t>
             </a:fld>
             <a:endParaRPr lang="en-US"/>
           </a:p>
@@ -1100,18 +1100,12 @@
           <a:p>
             <a:fld id="{C1FF6DA9-008F-8B48-92A6-B652298478BF}" type="slidenum">
               <a:rPr lang="en-US" smtClean="0"/>
-              <a:t>‹#›</a:t>
             </a:fld>
             <a:endParaRPr lang="en-US"/>
           </a:p>
         </p:txBody>
       </p:sp>
     </p:spTree>
-    <p:extLst>
-      <p:ext uri="{BB962C8B-B14F-4D97-AF65-F5344CB8AC3E}">
-        <p14:creationId xmlns:p14="http://schemas.microsoft.com/office/powerpoint/2010/main" val="960648375"/>
-      </p:ext>
-    </p:extLst>
   </p:cSld>
   <p:clrMapOvr>
     <a:masterClrMapping/>
@@ -1212,6 +1206,7 @@
               <a:rPr lang="en-US" smtClean="0"/>
               <a:t>Click to edit Master text styles</a:t>
             </a:r>
+            <a:endParaRPr lang="en-US" smtClean="0"/>
           </a:p>
           <a:p>
             <a:pPr lvl="1"/>
@@ -1219,6 +1214,7 @@
               <a:rPr lang="en-US" smtClean="0"/>
               <a:t>Second level</a:t>
             </a:r>
+            <a:endParaRPr lang="en-US" smtClean="0"/>
           </a:p>
           <a:p>
             <a:pPr lvl="2"/>
@@ -1226,6 +1222,7 @@
               <a:rPr lang="en-US" smtClean="0"/>
               <a:t>Third level</a:t>
             </a:r>
+            <a:endParaRPr lang="en-US" smtClean="0"/>
           </a:p>
           <a:p>
             <a:pPr lvl="3"/>
@@ -1233,6 +1230,7 @@
               <a:rPr lang="en-US" smtClean="0"/>
               <a:t>Fourth level</a:t>
             </a:r>
+            <a:endParaRPr lang="en-US" smtClean="0"/>
           </a:p>
           <a:p>
             <a:pPr lvl="4"/>
@@ -1297,6 +1295,7 @@
               <a:rPr lang="en-US" smtClean="0"/>
               <a:t>Click to edit Master text styles</a:t>
             </a:r>
+            <a:endParaRPr lang="en-US" smtClean="0"/>
           </a:p>
           <a:p>
             <a:pPr lvl="1"/>
@@ -1304,6 +1303,7 @@
               <a:rPr lang="en-US" smtClean="0"/>
               <a:t>Second level</a:t>
             </a:r>
+            <a:endParaRPr lang="en-US" smtClean="0"/>
           </a:p>
           <a:p>
             <a:pPr lvl="2"/>
@@ -1311,6 +1311,7 @@
               <a:rPr lang="en-US" smtClean="0"/>
               <a:t>Third level</a:t>
             </a:r>
+            <a:endParaRPr lang="en-US" smtClean="0"/>
           </a:p>
           <a:p>
             <a:pPr lvl="3"/>
@@ -1318,6 +1319,7 @@
               <a:rPr lang="en-US" smtClean="0"/>
               <a:t>Fourth level</a:t>
             </a:r>
+            <a:endParaRPr lang="en-US" smtClean="0"/>
           </a:p>
           <a:p>
             <a:pPr lvl="4"/>
@@ -1346,7 +1348,6 @@
           <a:p>
             <a:fld id="{5BCAD085-E8A6-8845-BD4E-CB4CCA059FC4}" type="datetimeFigureOut">
               <a:rPr lang="en-US" smtClean="0"/>
-              <a:t>1/27/13</a:t>
             </a:fld>
             <a:endParaRPr lang="en-US"/>
           </a:p>
@@ -1388,18 +1389,12 @@
           <a:p>
             <a:fld id="{C1FF6DA9-008F-8B48-92A6-B652298478BF}" type="slidenum">
               <a:rPr lang="en-US" smtClean="0"/>
-              <a:t>‹#›</a:t>
             </a:fld>
             <a:endParaRPr lang="en-US"/>
           </a:p>
         </p:txBody>
       </p:sp>
     </p:spTree>
-    <p:extLst>
-      <p:ext uri="{BB962C8B-B14F-4D97-AF65-F5344CB8AC3E}">
-        <p14:creationId xmlns:p14="http://schemas.microsoft.com/office/powerpoint/2010/main" val="2782244947"/>
-      </p:ext>
-    </p:extLst>
   </p:cSld>
   <p:clrMapOvr>
     <a:masterClrMapping/>
@@ -1513,6 +1508,7 @@
               <a:rPr lang="en-US" smtClean="0"/>
               <a:t>Click to edit Master text styles</a:t>
             </a:r>
+            <a:endParaRPr lang="en-US" smtClean="0"/>
           </a:p>
         </p:txBody>
       </p:sp>
@@ -1569,6 +1565,7 @@
               <a:rPr lang="en-US" smtClean="0"/>
               <a:t>Click to edit Master text styles</a:t>
             </a:r>
+            <a:endParaRPr lang="en-US" smtClean="0"/>
           </a:p>
           <a:p>
             <a:pPr lvl="1"/>
@@ -1576,6 +1573,7 @@
               <a:rPr lang="en-US" smtClean="0"/>
               <a:t>Second level</a:t>
             </a:r>
+            <a:endParaRPr lang="en-US" smtClean="0"/>
           </a:p>
           <a:p>
             <a:pPr lvl="2"/>
@@ -1583,6 +1581,7 @@
               <a:rPr lang="en-US" smtClean="0"/>
               <a:t>Third level</a:t>
             </a:r>
+            <a:endParaRPr lang="en-US" smtClean="0"/>
           </a:p>
           <a:p>
             <a:pPr lvl="3"/>
@@ -1590,6 +1589,7 @@
               <a:rPr lang="en-US" smtClean="0"/>
               <a:t>Fourth level</a:t>
             </a:r>
+            <a:endParaRPr lang="en-US" smtClean="0"/>
           </a:p>
           <a:p>
             <a:pPr lvl="4"/>
@@ -1663,6 +1663,7 @@
               <a:rPr lang="en-US" smtClean="0"/>
               <a:t>Click to edit Master text styles</a:t>
             </a:r>
+            <a:endParaRPr lang="en-US" smtClean="0"/>
           </a:p>
         </p:txBody>
       </p:sp>
@@ -1719,6 +1720,7 @@
               <a:rPr lang="en-US" smtClean="0"/>
               <a:t>Click to edit Master text styles</a:t>
             </a:r>
+            <a:endParaRPr lang="en-US" smtClean="0"/>
           </a:p>
           <a:p>
             <a:pPr lvl="1"/>
@@ -1726,6 +1728,7 @@
               <a:rPr lang="en-US" smtClean="0"/>
               <a:t>Second level</a:t>
             </a:r>
+            <a:endParaRPr lang="en-US" smtClean="0"/>
           </a:p>
           <a:p>
             <a:pPr lvl="2"/>
@@ -1733,6 +1736,7 @@
               <a:rPr lang="en-US" smtClean="0"/>
               <a:t>Third level</a:t>
             </a:r>
+            <a:endParaRPr lang="en-US" smtClean="0"/>
           </a:p>
           <a:p>
             <a:pPr lvl="3"/>
@@ -1740,6 +1744,7 @@
               <a:rPr lang="en-US" smtClean="0"/>
               <a:t>Fourth level</a:t>
             </a:r>
+            <a:endParaRPr lang="en-US" smtClean="0"/>
           </a:p>
           <a:p>
             <a:pPr lvl="4"/>
@@ -1768,7 +1773,6 @@
           <a:p>
             <a:fld id="{5BCAD085-E8A6-8845-BD4E-CB4CCA059FC4}" type="datetimeFigureOut">
               <a:rPr lang="en-US" smtClean="0"/>
-              <a:t>1/27/13</a:t>
             </a:fld>
             <a:endParaRPr lang="en-US"/>
           </a:p>
@@ -1810,18 +1814,12 @@
           <a:p>
             <a:fld id="{C1FF6DA9-008F-8B48-92A6-B652298478BF}" type="slidenum">
               <a:rPr lang="en-US" smtClean="0"/>
-              <a:t>‹#›</a:t>
             </a:fld>
             <a:endParaRPr lang="en-US"/>
           </a:p>
         </p:txBody>
       </p:sp>
     </p:spTree>
-    <p:extLst>
-      <p:ext uri="{BB962C8B-B14F-4D97-AF65-F5344CB8AC3E}">
-        <p14:creationId xmlns:p14="http://schemas.microsoft.com/office/powerpoint/2010/main" val="990158736"/>
-      </p:ext>
-    </p:extLst>
   </p:cSld>
   <p:clrMapOvr>
     <a:masterClrMapping/>
@@ -1886,7 +1884,6 @@
           <a:p>
             <a:fld id="{5BCAD085-E8A6-8845-BD4E-CB4CCA059FC4}" type="datetimeFigureOut">
               <a:rPr lang="en-US" smtClean="0"/>
-              <a:t>1/27/13</a:t>
             </a:fld>
             <a:endParaRPr lang="en-US"/>
           </a:p>
@@ -1928,18 +1925,12 @@
           <a:p>
             <a:fld id="{C1FF6DA9-008F-8B48-92A6-B652298478BF}" type="slidenum">
               <a:rPr lang="en-US" smtClean="0"/>
-              <a:t>‹#›</a:t>
             </a:fld>
             <a:endParaRPr lang="en-US"/>
           </a:p>
         </p:txBody>
       </p:sp>
     </p:spTree>
-    <p:extLst>
-      <p:ext uri="{BB962C8B-B14F-4D97-AF65-F5344CB8AC3E}">
-        <p14:creationId xmlns:p14="http://schemas.microsoft.com/office/powerpoint/2010/main" val="727027711"/>
-      </p:ext>
-    </p:extLst>
   </p:cSld>
   <p:clrMapOvr>
     <a:masterClrMapping/>
@@ -1981,7 +1972,6 @@
           <a:p>
             <a:fld id="{5BCAD085-E8A6-8845-BD4E-CB4CCA059FC4}" type="datetimeFigureOut">
               <a:rPr lang="en-US" smtClean="0"/>
-              <a:t>1/27/13</a:t>
             </a:fld>
             <a:endParaRPr lang="en-US"/>
           </a:p>
@@ -2023,18 +2013,12 @@
           <a:p>
             <a:fld id="{C1FF6DA9-008F-8B48-92A6-B652298478BF}" type="slidenum">
               <a:rPr lang="en-US" smtClean="0"/>
-              <a:t>‹#›</a:t>
             </a:fld>
             <a:endParaRPr lang="en-US"/>
           </a:p>
         </p:txBody>
       </p:sp>
     </p:spTree>
-    <p:extLst>
-      <p:ext uri="{BB962C8B-B14F-4D97-AF65-F5344CB8AC3E}">
-        <p14:creationId xmlns:p14="http://schemas.microsoft.com/office/powerpoint/2010/main" val="1212999818"/>
-      </p:ext>
-    </p:extLst>
   </p:cSld>
   <p:clrMapOvr>
     <a:masterClrMapping/>
@@ -2144,6 +2128,7 @@
               <a:rPr lang="en-US" smtClean="0"/>
               <a:t>Click to edit Master text styles</a:t>
             </a:r>
+            <a:endParaRPr lang="en-US" smtClean="0"/>
           </a:p>
           <a:p>
             <a:pPr lvl="1"/>
@@ -2151,6 +2136,7 @@
               <a:rPr lang="en-US" smtClean="0"/>
               <a:t>Second level</a:t>
             </a:r>
+            <a:endParaRPr lang="en-US" smtClean="0"/>
           </a:p>
           <a:p>
             <a:pPr lvl="2"/>
@@ -2158,6 +2144,7 @@
               <a:rPr lang="en-US" smtClean="0"/>
               <a:t>Third level</a:t>
             </a:r>
+            <a:endParaRPr lang="en-US" smtClean="0"/>
           </a:p>
           <a:p>
             <a:pPr lvl="3"/>
@@ -2165,6 +2152,7 @@
               <a:rPr lang="en-US" smtClean="0"/>
               <a:t>Fourth level</a:t>
             </a:r>
+            <a:endParaRPr lang="en-US" smtClean="0"/>
           </a:p>
           <a:p>
             <a:pPr lvl="4"/>
@@ -2238,6 +2226,7 @@
               <a:rPr lang="en-US" smtClean="0"/>
               <a:t>Click to edit Master text styles</a:t>
             </a:r>
+            <a:endParaRPr lang="en-US" smtClean="0"/>
           </a:p>
         </p:txBody>
       </p:sp>
@@ -2258,7 +2247,6 @@
           <a:p>
             <a:fld id="{5BCAD085-E8A6-8845-BD4E-CB4CCA059FC4}" type="datetimeFigureOut">
               <a:rPr lang="en-US" smtClean="0"/>
-              <a:t>1/27/13</a:t>
             </a:fld>
             <a:endParaRPr lang="en-US"/>
           </a:p>
@@ -2300,18 +2288,12 @@
           <a:p>
             <a:fld id="{C1FF6DA9-008F-8B48-92A6-B652298478BF}" type="slidenum">
               <a:rPr lang="en-US" smtClean="0"/>
-              <a:t>‹#›</a:t>
             </a:fld>
             <a:endParaRPr lang="en-US"/>
           </a:p>
         </p:txBody>
       </p:sp>
     </p:spTree>
-    <p:extLst>
-      <p:ext uri="{BB962C8B-B14F-4D97-AF65-F5344CB8AC3E}">
-        <p14:creationId xmlns:p14="http://schemas.microsoft.com/office/powerpoint/2010/main" val="1840726560"/>
-      </p:ext>
-    </p:extLst>
   </p:cSld>
   <p:clrMapOvr>
     <a:masterClrMapping/>
@@ -2491,6 +2473,7 @@
               <a:rPr lang="en-US" smtClean="0"/>
               <a:t>Click to edit Master text styles</a:t>
             </a:r>
+            <a:endParaRPr lang="en-US" smtClean="0"/>
           </a:p>
         </p:txBody>
       </p:sp>
@@ -2511,7 +2494,6 @@
           <a:p>
             <a:fld id="{5BCAD085-E8A6-8845-BD4E-CB4CCA059FC4}" type="datetimeFigureOut">
               <a:rPr lang="en-US" smtClean="0"/>
-              <a:t>1/27/13</a:t>
             </a:fld>
             <a:endParaRPr lang="en-US"/>
           </a:p>
@@ -2553,18 +2535,12 @@
           <a:p>
             <a:fld id="{C1FF6DA9-008F-8B48-92A6-B652298478BF}" type="slidenum">
               <a:rPr lang="en-US" smtClean="0"/>
-              <a:t>‹#›</a:t>
             </a:fld>
             <a:endParaRPr lang="en-US"/>
           </a:p>
         </p:txBody>
       </p:sp>
     </p:spTree>
-    <p:extLst>
-      <p:ext uri="{BB962C8B-B14F-4D97-AF65-F5344CB8AC3E}">
-        <p14:creationId xmlns:p14="http://schemas.microsoft.com/office/powerpoint/2010/main" val="3889236939"/>
-      </p:ext>
-    </p:extLst>
   </p:cSld>
   <p:clrMapOvr>
     <a:masterClrMapping/>
@@ -2657,6 +2633,7 @@
               <a:rPr lang="en-US" smtClean="0"/>
               <a:t>Click to edit Master text styles</a:t>
             </a:r>
+            <a:endParaRPr lang="en-US" smtClean="0"/>
           </a:p>
           <a:p>
             <a:pPr lvl="1"/>
@@ -2664,6 +2641,7 @@
               <a:rPr lang="en-US" smtClean="0"/>
               <a:t>Second level</a:t>
             </a:r>
+            <a:endParaRPr lang="en-US" smtClean="0"/>
           </a:p>
           <a:p>
             <a:pPr lvl="2"/>
@@ -2671,6 +2649,7 @@
               <a:rPr lang="en-US" smtClean="0"/>
               <a:t>Third level</a:t>
             </a:r>
+            <a:endParaRPr lang="en-US" smtClean="0"/>
           </a:p>
           <a:p>
             <a:pPr lvl="3"/>
@@ -2678,6 +2657,7 @@
               <a:rPr lang="en-US" smtClean="0"/>
               <a:t>Fourth level</a:t>
             </a:r>
+            <a:endParaRPr lang="en-US" smtClean="0"/>
           </a:p>
           <a:p>
             <a:pPr lvl="4"/>
@@ -2724,7 +2704,6 @@
           <a:p>
             <a:fld id="{5BCAD085-E8A6-8845-BD4E-CB4CCA059FC4}" type="datetimeFigureOut">
               <a:rPr lang="en-US" smtClean="0"/>
-              <a:t>1/27/13</a:t>
             </a:fld>
             <a:endParaRPr lang="en-US"/>
           </a:p>
@@ -2802,18 +2781,12 @@
           <a:p>
             <a:fld id="{C1FF6DA9-008F-8B48-92A6-B652298478BF}" type="slidenum">
               <a:rPr lang="en-US" smtClean="0"/>
-              <a:t>‹#›</a:t>
             </a:fld>
             <a:endParaRPr lang="en-US"/>
           </a:p>
         </p:txBody>
       </p:sp>
     </p:spTree>
-    <p:extLst>
-      <p:ext uri="{BB962C8B-B14F-4D97-AF65-F5344CB8AC3E}">
-        <p14:creationId xmlns:p14="http://schemas.microsoft.com/office/powerpoint/2010/main" val="2209977519"/>
-      </p:ext>
-    </p:extLst>
   </p:cSld>
   <p:clrMap bg1="lt1" tx1="dk1" bg2="lt2" tx2="dk2" accent1="accent1" accent2="accent2" accent3="accent3" accent4="accent4" accent5="accent5" accent6="accent6" hlink="hlink" folHlink="folHlink"/>
   <p:sldLayoutIdLst>
@@ -2851,7 +2824,7 @@
         <a:spcBef>
           <a:spcPct val="20000"/>
         </a:spcBef>
-        <a:buFont typeface="Arial"/>
+        <a:buFont typeface="Arial" panose="020B0604020202090204"/>
         <a:buChar char="•"/>
         <a:defRPr sz="3200" kern="1200">
           <a:solidFill>
@@ -2866,7 +2839,7 @@
         <a:spcBef>
           <a:spcPct val="20000"/>
         </a:spcBef>
-        <a:buFont typeface="Arial"/>
+        <a:buFont typeface="Arial" panose="020B0604020202090204"/>
         <a:buChar char="–"/>
         <a:defRPr sz="2800" kern="1200">
           <a:solidFill>
@@ -2881,7 +2854,7 @@
         <a:spcBef>
           <a:spcPct val="20000"/>
         </a:spcBef>
-        <a:buFont typeface="Arial"/>
+        <a:buFont typeface="Arial" panose="020B0604020202090204"/>
         <a:buChar char="•"/>
         <a:defRPr sz="2400" kern="1200">
           <a:solidFill>
@@ -2896,7 +2869,7 @@
         <a:spcBef>
           <a:spcPct val="20000"/>
         </a:spcBef>
-        <a:buFont typeface="Arial"/>
+        <a:buFont typeface="Arial" panose="020B0604020202090204"/>
         <a:buChar char="–"/>
         <a:defRPr sz="2000" kern="1200">
           <a:solidFill>
@@ -2911,7 +2884,7 @@
         <a:spcBef>
           <a:spcPct val="20000"/>
         </a:spcBef>
-        <a:buFont typeface="Arial"/>
+        <a:buFont typeface="Arial" panose="020B0604020202090204"/>
         <a:buChar char="»"/>
         <a:defRPr sz="2000" kern="1200">
           <a:solidFill>
@@ -2926,7 +2899,7 @@
         <a:spcBef>
           <a:spcPct val="20000"/>
         </a:spcBef>
-        <a:buFont typeface="Arial"/>
+        <a:buFont typeface="Arial" panose="020B0604020202090204"/>
         <a:buChar char="•"/>
         <a:defRPr sz="2000" kern="1200">
           <a:solidFill>
@@ -2941,7 +2914,7 @@
         <a:spcBef>
           <a:spcPct val="20000"/>
         </a:spcBef>
-        <a:buFont typeface="Arial"/>
+        <a:buFont typeface="Arial" panose="020B0604020202090204"/>
         <a:buChar char="•"/>
         <a:defRPr sz="2000" kern="1200">
           <a:solidFill>
@@ -2956,7 +2929,7 @@
         <a:spcBef>
           <a:spcPct val="20000"/>
         </a:spcBef>
-        <a:buFont typeface="Arial"/>
+        <a:buFont typeface="Arial" panose="020B0604020202090204"/>
         <a:buChar char="•"/>
         <a:defRPr sz="2000" kern="1200">
           <a:solidFill>
@@ -2971,7 +2944,7 @@
         <a:spcBef>
           <a:spcPct val="20000"/>
         </a:spcBef>
-        <a:buFont typeface="Arial"/>
+        <a:buFont typeface="Arial" panose="020B0604020202090204"/>
         <a:buChar char="•"/>
         <a:defRPr sz="2000" kern="1200">
           <a:solidFill>
@@ -3083,7 +3056,7 @@
 </file>
 
 <file path=ppt/slides/slide1.xml><?xml version="1.0" encoding="utf-8"?>
-<p:sld xmlns:a="http://schemas.openxmlformats.org/drawingml/2006/main" xmlns:p="http://schemas.openxmlformats.org/presentationml/2006/main" xmlns:r="http://schemas.openxmlformats.org/officeDocument/2006/relationships">
+<p:sld xmlns:a="http://schemas.openxmlformats.org/drawingml/2006/main" xmlns:r="http://schemas.openxmlformats.org/officeDocument/2006/relationships" xmlns:p="http://schemas.openxmlformats.org/presentationml/2006/main">
   <p:cSld>
     <p:spTree>
       <p:nvGrpSpPr>
@@ -3153,7 +3126,7 @@
           <a:noFill/>
         </p:spPr>
         <p:txBody>
-          <a:bodyPr wrap="square" anchor="t" lIns="0" rIns="0" tIns="0" bIns="0">
+          <a:bodyPr wrap="square" lIns="0" tIns="0" rIns="0" bIns="0" anchor="t">
             <a:spAutoFit/>
           </a:bodyPr>
           <a:lstStyle/>
@@ -3164,11 +3137,18 @@
                 <a:solidFill>
                   <a:srgbClr val="FFFFFF"/>
                 </a:solidFill>
-                <a:latin typeface="Arial"/>
+                <a:latin typeface="Arial" panose="020B0604020202090204"/>
                 <a:ea typeface="微软雅黑"/>
               </a:rPr>
               <a:t>家安 housafe · 商业计划书</a:t>
             </a:r>
+            <a:endParaRPr sz="950" b="0" i="0" spc="120">
+              <a:solidFill>
+                <a:srgbClr val="FFFFFF"/>
+              </a:solidFill>
+              <a:latin typeface="Arial" panose="020B0604020202090204"/>
+              <a:ea typeface="微软雅黑"/>
+            </a:endParaRPr>
           </a:p>
         </p:txBody>
       </p:sp>
@@ -3189,7 +3169,7 @@
           <a:noFill/>
         </p:spPr>
         <p:txBody>
-          <a:bodyPr wrap="square" anchor="t" lIns="0" rIns="0" tIns="0" bIns="0">
+          <a:bodyPr wrap="square" lIns="0" tIns="0" rIns="0" bIns="0" anchor="t">
             <a:spAutoFit/>
           </a:bodyPr>
           <a:lstStyle/>
@@ -3200,11 +3180,18 @@
                 <a:solidFill>
                   <a:srgbClr val="FFFFFF"/>
                 </a:solidFill>
-                <a:latin typeface="Arial"/>
+                <a:latin typeface="Arial" panose="020B0604020202090204"/>
                 <a:ea typeface="微软雅黑"/>
               </a:rPr>
               <a:t>2026 · 01 / 15</a:t>
             </a:r>
+            <a:endParaRPr sz="950" b="0" i="0" spc="120">
+              <a:solidFill>
+                <a:srgbClr val="FFFFFF"/>
+              </a:solidFill>
+              <a:latin typeface="Arial" panose="020B0604020202090204"/>
+              <a:ea typeface="微软雅黑"/>
+            </a:endParaRPr>
           </a:p>
         </p:txBody>
       </p:sp>
@@ -3225,7 +3212,7 @@
           <a:noFill/>
         </p:spPr>
         <p:txBody>
-          <a:bodyPr wrap="square" anchor="t" lIns="0" rIns="0" tIns="0" bIns="0">
+          <a:bodyPr wrap="square" lIns="0" tIns="0" rIns="0" bIns="0" anchor="t">
             <a:spAutoFit/>
           </a:bodyPr>
           <a:lstStyle/>
@@ -3236,11 +3223,18 @@
                 <a:solidFill>
                   <a:srgbClr val="FFFFFF"/>
                 </a:solidFill>
-                <a:latin typeface="Arial"/>
+                <a:latin typeface="Arial" panose="020B0604020202090204"/>
                 <a:ea typeface="微软雅黑"/>
               </a:rPr>
               <a:t>HOUSAFE · 居家养老 AI 健康守护</a:t>
             </a:r>
+            <a:endParaRPr sz="1050" b="1" i="0" spc="150">
+              <a:solidFill>
+                <a:srgbClr val="FFFFFF"/>
+              </a:solidFill>
+              <a:latin typeface="Arial" panose="020B0604020202090204"/>
+              <a:ea typeface="微软雅黑"/>
+            </a:endParaRPr>
           </a:p>
         </p:txBody>
       </p:sp>
@@ -3261,7 +3255,7 @@
           <a:noFill/>
         </p:spPr>
         <p:txBody>
-          <a:bodyPr wrap="square" anchor="t" lIns="0" rIns="0" tIns="0" bIns="0">
+          <a:bodyPr wrap="square" lIns="0" tIns="0" rIns="0" bIns="0" anchor="t">
             <a:spAutoFit/>
           </a:bodyPr>
           <a:lstStyle/>
@@ -3276,11 +3270,18 @@
                 <a:solidFill>
                   <a:srgbClr val="FFFFFF"/>
                 </a:solidFill>
-                <a:latin typeface="Arial"/>
+                <a:latin typeface="Arial" panose="020B0604020202090204"/>
                 <a:ea typeface="微软雅黑"/>
               </a:rPr>
               <a:t>让每个在家变老的人，</a:t>
             </a:r>
+            <a:endParaRPr sz="4000" b="0" i="0">
+              <a:solidFill>
+                <a:srgbClr val="FFFFFF"/>
+              </a:solidFill>
+              <a:latin typeface="Arial" panose="020B0604020202090204"/>
+              <a:ea typeface="微软雅黑"/>
+            </a:endParaRPr>
           </a:p>
           <a:p>
             <a:pPr>
@@ -3293,11 +3294,18 @@
                 <a:solidFill>
                   <a:srgbClr val="FFFFFF"/>
                 </a:solidFill>
-                <a:latin typeface="Arial"/>
+                <a:latin typeface="Arial" panose="020B0604020202090204"/>
                 <a:ea typeface="微软雅黑"/>
               </a:rPr>
               <a:t>被持续看见</a:t>
             </a:r>
+            <a:endParaRPr sz="4000" b="0" i="1">
+              <a:solidFill>
+                <a:srgbClr val="FFFFFF"/>
+              </a:solidFill>
+              <a:latin typeface="Arial" panose="020B0604020202090204"/>
+              <a:ea typeface="微软雅黑"/>
+            </a:endParaRPr>
           </a:p>
         </p:txBody>
       </p:sp>
@@ -3354,7 +3362,7 @@
           <a:noFill/>
         </p:spPr>
         <p:txBody>
-          <a:bodyPr wrap="square" anchor="t" lIns="0" rIns="0" tIns="0" bIns="0">
+          <a:bodyPr wrap="square" lIns="0" tIns="0" rIns="0" bIns="0" anchor="t">
             <a:spAutoFit/>
           </a:bodyPr>
           <a:lstStyle/>
@@ -3369,11 +3377,18 @@
                 <a:solidFill>
                   <a:srgbClr val="FFFFFF"/>
                 </a:solidFill>
-                <a:latin typeface="Arial"/>
+                <a:latin typeface="Arial" panose="020B0604020202090204"/>
                 <a:ea typeface="微软雅黑"/>
               </a:rPr>
               <a:t>面向异地子女的非接触式 AI 居家健康监测系统。毫米波雷达组网，无感采集老人在家的活动与生命体征，AI 识别异常、分级通知子女——从跌倒监测切入，做居家养老的健康基础设施。</a:t>
             </a:r>
+            <a:endParaRPr sz="1250" b="0" i="0">
+              <a:solidFill>
+                <a:srgbClr val="FFFFFF"/>
+              </a:solidFill>
+              <a:latin typeface="Arial" panose="020B0604020202090204"/>
+              <a:ea typeface="微软雅黑"/>
+            </a:endParaRPr>
           </a:p>
         </p:txBody>
       </p:sp>
@@ -3394,7 +3409,7 @@
           <a:noFill/>
         </p:spPr>
         <p:txBody>
-          <a:bodyPr wrap="square" anchor="t" lIns="0" rIns="0" tIns="0" bIns="0">
+          <a:bodyPr wrap="square" lIns="0" tIns="0" rIns="0" bIns="0" anchor="t">
             <a:spAutoFit/>
           </a:bodyPr>
           <a:lstStyle/>
@@ -3405,11 +3420,18 @@
                 <a:solidFill>
                   <a:srgbClr val="D5DDF2"/>
                 </a:solidFill>
-                <a:latin typeface="Arial"/>
+                <a:latin typeface="Arial" panose="020B0604020202090204"/>
                 <a:ea typeface="微软雅黑"/>
               </a:rPr>
               <a:t>天使轮 · 拟融资 800 万 / 18 个月跑道</a:t>
             </a:r>
+            <a:endParaRPr sz="1000" b="0" i="0" spc="120">
+              <a:solidFill>
+                <a:srgbClr val="D5DDF2"/>
+              </a:solidFill>
+              <a:latin typeface="Arial" panose="020B0604020202090204"/>
+              <a:ea typeface="微软雅黑"/>
+            </a:endParaRPr>
           </a:p>
         </p:txBody>
       </p:sp>
@@ -3430,7 +3452,7 @@
           <a:noFill/>
         </p:spPr>
         <p:txBody>
-          <a:bodyPr wrap="square" anchor="t" lIns="0" rIns="0" tIns="0" bIns="0">
+          <a:bodyPr wrap="square" lIns="0" tIns="0" rIns="0" bIns="0" anchor="t">
             <a:spAutoFit/>
           </a:bodyPr>
           <a:lstStyle/>
@@ -3441,11 +3463,18 @@
                 <a:solidFill>
                   <a:srgbClr val="D5DDF2"/>
                 </a:solidFill>
-                <a:latin typeface="Arial"/>
+                <a:latin typeface="Arial" panose="020B0604020202090204"/>
                 <a:ea typeface="微软雅黑"/>
               </a:rPr>
               <a:t>housafe · 2026</a:t>
             </a:r>
+            <a:endParaRPr sz="1000" b="0" i="0" spc="120">
+              <a:solidFill>
+                <a:srgbClr val="D5DDF2"/>
+              </a:solidFill>
+              <a:latin typeface="Arial" panose="020B0604020202090204"/>
+              <a:ea typeface="微软雅黑"/>
+            </a:endParaRPr>
           </a:p>
         </p:txBody>
       </p:sp>
@@ -3458,7 +3487,7 @@
 </file>
 
 <file path=ppt/slides/slide2.xml><?xml version="1.0" encoding="utf-8"?>
-<p:sld xmlns:a="http://schemas.openxmlformats.org/drawingml/2006/main" xmlns:p="http://schemas.openxmlformats.org/presentationml/2006/main" xmlns:r="http://schemas.openxmlformats.org/officeDocument/2006/relationships">
+<p:sld xmlns:a="http://schemas.openxmlformats.org/drawingml/2006/main" xmlns:r="http://schemas.openxmlformats.org/officeDocument/2006/relationships" xmlns:p="http://schemas.openxmlformats.org/presentationml/2006/main">
   <p:cSld>
     <p:spTree>
       <p:nvGrpSpPr>
@@ -3469,20 +3498,196 @@
       <p:grpSpPr/>
       <p:sp>
         <p:nvSpPr>
-          <p:cNvPr id="2" name="Rectangle 1"/>
+          <p:cNvPr id="3" name="TextBox 2"/>
+          <p:cNvSpPr txBox="1"/>
+          <p:nvPr/>
+        </p:nvSpPr>
+        <p:spPr>
+          <a:xfrm>
+            <a:off x="502920" y="329184"/>
+            <a:ext cx="7315200" cy="274320"/>
+          </a:xfrm>
+          <a:prstGeom prst="rect">
+            <a:avLst/>
+          </a:prstGeom>
+          <a:noFill/>
+        </p:spPr>
+        <p:txBody>
+          <a:bodyPr wrap="square" lIns="0" tIns="0" rIns="0" bIns="0" anchor="t">
+            <a:spAutoFit/>
+          </a:bodyPr>
+          <a:lstStyle/>
+          <a:p>
+            <a:pPr algn="l"/>
+            <a:r>
+              <a:rPr sz="950" b="0" i="0" spc="120">
+                <a:solidFill>
+                  <a:srgbClr val="737373"/>
+                </a:solidFill>
+                <a:latin typeface="Arial" panose="020B0604020202090204"/>
+                <a:ea typeface="微软雅黑"/>
+              </a:rPr>
+              <a:t>浅色内容版式 · LIGHT LAYOUT</a:t>
+            </a:r>
+            <a:endParaRPr sz="950" b="0" i="0" spc="120">
+              <a:solidFill>
+                <a:srgbClr val="737373"/>
+              </a:solidFill>
+              <a:latin typeface="Arial" panose="020B0604020202090204"/>
+              <a:ea typeface="微软雅黑"/>
+            </a:endParaRPr>
+          </a:p>
+        </p:txBody>
+      </p:sp>
+      <p:sp>
+        <p:nvSpPr>
+          <p:cNvPr id="4" name="TextBox 3"/>
+          <p:cNvSpPr txBox="1"/>
+          <p:nvPr/>
+        </p:nvSpPr>
+        <p:spPr>
+          <a:xfrm>
+            <a:off x="5790895" y="329184"/>
+            <a:ext cx="5897880" cy="274320"/>
+          </a:xfrm>
+          <a:prstGeom prst="rect">
+            <a:avLst/>
+          </a:prstGeom>
+          <a:noFill/>
+        </p:spPr>
+        <p:txBody>
+          <a:bodyPr wrap="square" lIns="0" tIns="0" rIns="0" bIns="0" anchor="t">
+            <a:spAutoFit/>
+          </a:bodyPr>
+          <a:lstStyle/>
+          <a:p>
+            <a:pPr algn="r"/>
+            <a:r>
+              <a:rPr sz="950" b="0" i="0" spc="120">
+                <a:solidFill>
+                  <a:srgbClr val="737373"/>
+                </a:solidFill>
+                <a:latin typeface="Arial" panose="020B0604020202090204"/>
+                <a:ea typeface="微软雅黑"/>
+              </a:rPr>
+              <a:t>LAYOUT / LIGHT</a:t>
+            </a:r>
+            <a:endParaRPr sz="950" b="0" i="0" spc="120">
+              <a:solidFill>
+                <a:srgbClr val="737373"/>
+              </a:solidFill>
+              <a:latin typeface="Arial" panose="020B0604020202090204"/>
+              <a:ea typeface="微软雅黑"/>
+            </a:endParaRPr>
+          </a:p>
+        </p:txBody>
+      </p:sp>
+      <p:sp>
+        <p:nvSpPr>
+          <p:cNvPr id="5" name="TextBox 4"/>
+          <p:cNvSpPr txBox="1"/>
+          <p:nvPr/>
+        </p:nvSpPr>
+        <p:spPr>
+          <a:xfrm>
+            <a:off x="502920" y="731520"/>
+            <a:ext cx="8229600" cy="274320"/>
+          </a:xfrm>
+          <a:prstGeom prst="rect">
+            <a:avLst/>
+          </a:prstGeom>
+          <a:noFill/>
+        </p:spPr>
+        <p:txBody>
+          <a:bodyPr wrap="square" lIns="0" tIns="0" rIns="0" bIns="0" anchor="t">
+            <a:spAutoFit/>
+          </a:bodyPr>
+          <a:lstStyle/>
+          <a:p>
+            <a:pPr algn="l"/>
+            <a:r>
+              <a:rPr sz="1050" b="1" i="0" spc="150">
+                <a:solidFill>
+                  <a:srgbClr val="002FA7"/>
+                </a:solidFill>
+                <a:latin typeface="Arial" panose="020B0604020202090204"/>
+                <a:ea typeface="微软雅黑"/>
+              </a:rPr>
+              <a:t>KICKER · 章节英文标签</a:t>
+            </a:r>
+            <a:endParaRPr sz="1050" b="1" i="0" spc="150">
+              <a:solidFill>
+                <a:srgbClr val="002FA7"/>
+              </a:solidFill>
+              <a:latin typeface="Arial" panose="020B0604020202090204"/>
+              <a:ea typeface="微软雅黑"/>
+            </a:endParaRPr>
+          </a:p>
+        </p:txBody>
+      </p:sp>
+      <p:sp>
+        <p:nvSpPr>
+          <p:cNvPr id="6" name="TextBox 5"/>
+          <p:cNvSpPr txBox="1"/>
+          <p:nvPr/>
+        </p:nvSpPr>
+        <p:spPr>
+          <a:xfrm>
+            <a:off x="502920" y="1005840"/>
+            <a:ext cx="11155680" cy="1143000"/>
+          </a:xfrm>
+          <a:prstGeom prst="rect">
+            <a:avLst/>
+          </a:prstGeom>
+          <a:noFill/>
+        </p:spPr>
+        <p:txBody>
+          <a:bodyPr wrap="square" lIns="0" tIns="0" rIns="0" bIns="0" anchor="t">
+            <a:spAutoFit/>
+          </a:bodyPr>
+          <a:lstStyle/>
+          <a:p>
+            <a:pPr>
+              <a:lnSpc>
+                <a:spcPct val="105000"/>
+              </a:lnSpc>
+            </a:pPr>
+            <a:r>
+              <a:rPr sz="2600" b="0" i="0">
+                <a:solidFill>
+                  <a:srgbClr val="0A0A0A"/>
+                </a:solidFill>
+                <a:latin typeface="Arial" panose="020B0604020202090204"/>
+                <a:ea typeface="微软雅黑"/>
+              </a:rPr>
+              <a:t>主标题占位 · 无衬线细体</a:t>
+            </a:r>
+            <a:endParaRPr sz="2600" b="0" i="0">
+              <a:solidFill>
+                <a:srgbClr val="0A0A0A"/>
+              </a:solidFill>
+              <a:latin typeface="Arial" panose="020B0604020202090204"/>
+              <a:ea typeface="微软雅黑"/>
+            </a:endParaRPr>
+          </a:p>
+        </p:txBody>
+      </p:sp>
+      <p:sp>
+        <p:nvSpPr>
+          <p:cNvPr id="7" name="Rectangle 6"/>
           <p:cNvSpPr/>
           <p:nvPr/>
         </p:nvSpPr>
         <p:spPr>
           <a:xfrm>
-            <a:off x="0" y="0"/>
-            <a:ext cx="12191695" cy="6858000"/>
+            <a:off x="502920" y="2194560"/>
+            <a:ext cx="3566160" cy="2194560"/>
           </a:xfrm>
           <a:prstGeom prst="rect">
             <a:avLst/>
           </a:prstGeom>
           <a:solidFill>
-            <a:srgbClr val="FAFAF8"/>
+            <a:srgbClr val="F5F5F4"/>
           </a:solidFill>
           <a:ln>
             <a:noFill/>
@@ -3513,14 +3718,14 @@
       </p:sp>
       <p:sp>
         <p:nvSpPr>
-          <p:cNvPr id="3" name="TextBox 2"/>
+          <p:cNvPr id="8" name="TextBox 7"/>
           <p:cNvSpPr txBox="1"/>
           <p:nvPr/>
         </p:nvSpPr>
         <p:spPr>
           <a:xfrm>
-            <a:off x="502920" y="329184"/>
-            <a:ext cx="7315200" cy="274320"/>
+            <a:off x="704088" y="2395728"/>
+            <a:ext cx="3200400" cy="274320"/>
           </a:xfrm>
           <a:prstGeom prst="rect">
             <a:avLst/>
@@ -3528,35 +3733,42 @@
           <a:noFill/>
         </p:spPr>
         <p:txBody>
-          <a:bodyPr wrap="square" anchor="t" lIns="0" rIns="0" tIns="0" bIns="0">
+          <a:bodyPr wrap="square" lIns="0" tIns="0" rIns="0" bIns="0" anchor="t">
             <a:spAutoFit/>
           </a:bodyPr>
           <a:lstStyle/>
           <a:p>
             <a:pPr algn="l"/>
             <a:r>
-              <a:rPr sz="950" b="0" i="0" spc="120">
+              <a:rPr sz="950" b="0" i="0" spc="110">
                 <a:solidFill>
                   <a:srgbClr val="737373"/>
                 </a:solidFill>
-                <a:latin typeface="Arial"/>
+                <a:latin typeface="Arial" panose="020B0604020202090204"/>
                 <a:ea typeface="微软雅黑"/>
               </a:rPr>
-              <a:t>浅色内容版式 · LIGHT LAYOUT</a:t>
-            </a:r>
-          </a:p>
-        </p:txBody>
-      </p:sp>
-      <p:sp>
-        <p:nvSpPr>
-          <p:cNvPr id="4" name="TextBox 3"/>
+              <a:t>01 卡片标签</a:t>
+            </a:r>
+            <a:endParaRPr sz="950" b="0" i="0" spc="110">
+              <a:solidFill>
+                <a:srgbClr val="737373"/>
+              </a:solidFill>
+              <a:latin typeface="Arial" panose="020B0604020202090204"/>
+              <a:ea typeface="微软雅黑"/>
+            </a:endParaRPr>
+          </a:p>
+        </p:txBody>
+      </p:sp>
+      <p:sp>
+        <p:nvSpPr>
+          <p:cNvPr id="9" name="TextBox 8"/>
           <p:cNvSpPr txBox="1"/>
           <p:nvPr/>
         </p:nvSpPr>
         <p:spPr>
           <a:xfrm>
-            <a:off x="5790895" y="329184"/>
-            <a:ext cx="5897880" cy="274320"/>
+            <a:off x="704088" y="2743200"/>
+            <a:ext cx="3200400" cy="365760"/>
           </a:xfrm>
           <a:prstGeom prst="rect">
             <a:avLst/>
@@ -3564,35 +3776,42 @@
           <a:noFill/>
         </p:spPr>
         <p:txBody>
-          <a:bodyPr wrap="square" anchor="t" lIns="0" rIns="0" tIns="0" bIns="0">
+          <a:bodyPr wrap="square" lIns="0" tIns="0" rIns="0" bIns="0" anchor="t">
             <a:spAutoFit/>
           </a:bodyPr>
           <a:lstStyle/>
           <a:p>
-            <a:pPr algn="r"/>
-            <a:r>
-              <a:rPr sz="950" b="0" i="0" spc="120">
-                <a:solidFill>
-                  <a:srgbClr val="737373"/>
-                </a:solidFill>
-                <a:latin typeface="Arial"/>
+            <a:pPr algn="l"/>
+            <a:r>
+              <a:rPr sz="1500" b="0" i="0">
+                <a:solidFill>
+                  <a:srgbClr val="0A0A0A"/>
+                </a:solidFill>
+                <a:latin typeface="Arial" panose="020B0604020202090204"/>
                 <a:ea typeface="微软雅黑"/>
               </a:rPr>
-              <a:t>LAYOUT / LIGHT</a:t>
-            </a:r>
-          </a:p>
-        </p:txBody>
-      </p:sp>
-      <p:sp>
-        <p:nvSpPr>
-          <p:cNvPr id="5" name="TextBox 4"/>
+              <a:t>卡片标题占位</a:t>
+            </a:r>
+            <a:endParaRPr sz="1500" b="0" i="0">
+              <a:solidFill>
+                <a:srgbClr val="0A0A0A"/>
+              </a:solidFill>
+              <a:latin typeface="Arial" panose="020B0604020202090204"/>
+              <a:ea typeface="微软雅黑"/>
+            </a:endParaRPr>
+          </a:p>
+        </p:txBody>
+      </p:sp>
+      <p:sp>
+        <p:nvSpPr>
+          <p:cNvPr id="10" name="TextBox 9"/>
           <p:cNvSpPr txBox="1"/>
           <p:nvPr/>
         </p:nvSpPr>
         <p:spPr>
           <a:xfrm>
-            <a:off x="502920" y="731520"/>
-            <a:ext cx="8229600" cy="274320"/>
+            <a:off x="704088" y="3246120"/>
+            <a:ext cx="3200400" cy="914400"/>
           </a:xfrm>
           <a:prstGeom prst="rect">
             <a:avLst/>
@@ -3600,74 +3819,45 @@
           <a:noFill/>
         </p:spPr>
         <p:txBody>
-          <a:bodyPr wrap="square" anchor="t" lIns="0" rIns="0" tIns="0" bIns="0">
+          <a:bodyPr wrap="square" lIns="0" tIns="0" rIns="0" bIns="0" anchor="t">
             <a:spAutoFit/>
           </a:bodyPr>
           <a:lstStyle/>
           <a:p>
-            <a:pPr algn="l"/>
-            <a:r>
-              <a:rPr sz="1050" b="1" i="0" spc="150">
-                <a:solidFill>
-                  <a:srgbClr val="002FA7"/>
-                </a:solidFill>
-                <a:latin typeface="Arial"/>
+            <a:pPr algn="l">
+              <a:lnSpc>
+                <a:spcPct val="135000"/>
+              </a:lnSpc>
+            </a:pPr>
+            <a:r>
+              <a:rPr sz="1000" b="0" i="0">
+                <a:solidFill>
+                  <a:srgbClr val="444444"/>
+                </a:solidFill>
+                <a:latin typeface="Arial" panose="020B0604020202090204"/>
                 <a:ea typeface="微软雅黑"/>
               </a:rPr>
-              <a:t>KICKER · 章节英文标签</a:t>
-            </a:r>
-          </a:p>
-        </p:txBody>
-      </p:sp>
-      <p:sp>
-        <p:nvSpPr>
-          <p:cNvPr id="6" name="TextBox 5"/>
-          <p:cNvSpPr txBox="1"/>
-          <p:nvPr/>
-        </p:nvSpPr>
-        <p:spPr>
-          <a:xfrm>
-            <a:off x="502920" y="1005840"/>
-            <a:ext cx="11155680" cy="1143000"/>
-          </a:xfrm>
-          <a:prstGeom prst="rect">
-            <a:avLst/>
-          </a:prstGeom>
-          <a:noFill/>
-        </p:spPr>
-        <p:txBody>
-          <a:bodyPr wrap="square" anchor="t" lIns="0" rIns="0" tIns="0" bIns="0">
-            <a:spAutoFit/>
-          </a:bodyPr>
-          <a:lstStyle/>
-          <a:p>
-            <a:pPr>
-              <a:lnSpc>
-                <a:spcPct val="105000"/>
-              </a:lnSpc>
-            </a:pPr>
-            <a:r>
-              <a:rPr sz="2600" b="0" i="0">
-                <a:solidFill>
-                  <a:srgbClr val="0A0A0A"/>
-                </a:solidFill>
-                <a:latin typeface="Arial"/>
-                <a:ea typeface="微软雅黑"/>
-              </a:rPr>
-              <a:t>主标题占位 · 无衬线细体</a:t>
-            </a:r>
-          </a:p>
-        </p:txBody>
-      </p:sp>
-      <p:sp>
-        <p:nvSpPr>
-          <p:cNvPr id="7" name="Rectangle 6"/>
+              <a:t>正文占位。瑞士风：直角纯色块 + 无衬线 + 单一 IKB 强调色 + 发丝线。</a:t>
+            </a:r>
+            <a:endParaRPr sz="1000" b="0" i="0">
+              <a:solidFill>
+                <a:srgbClr val="444444"/>
+              </a:solidFill>
+              <a:latin typeface="Arial" panose="020B0604020202090204"/>
+              <a:ea typeface="微软雅黑"/>
+            </a:endParaRPr>
+          </a:p>
+        </p:txBody>
+      </p:sp>
+      <p:sp>
+        <p:nvSpPr>
+          <p:cNvPr id="11" name="Rectangle 10"/>
           <p:cNvSpPr/>
           <p:nvPr/>
         </p:nvSpPr>
         <p:spPr>
           <a:xfrm>
-            <a:off x="502920" y="2194560"/>
+            <a:off x="4325112" y="2194560"/>
             <a:ext cx="3566160" cy="2194560"/>
           </a:xfrm>
           <a:prstGeom prst="rect">
@@ -3705,13 +3895,13 @@
       </p:sp>
       <p:sp>
         <p:nvSpPr>
-          <p:cNvPr id="8" name="TextBox 7"/>
+          <p:cNvPr id="12" name="TextBox 11"/>
           <p:cNvSpPr txBox="1"/>
           <p:nvPr/>
         </p:nvSpPr>
         <p:spPr>
           <a:xfrm>
-            <a:off x="704088" y="2395728"/>
+            <a:off x="4526279" y="2395728"/>
             <a:ext cx="3200400" cy="274320"/>
           </a:xfrm>
           <a:prstGeom prst="rect">
@@ -3720,7 +3910,7 @@
           <a:noFill/>
         </p:spPr>
         <p:txBody>
-          <a:bodyPr wrap="square" anchor="t" lIns="0" rIns="0" tIns="0" bIns="0">
+          <a:bodyPr wrap="square" lIns="0" tIns="0" rIns="0" bIns="0" anchor="t">
             <a:spAutoFit/>
           </a:bodyPr>
           <a:lstStyle/>
@@ -3731,23 +3921,30 @@
                 <a:solidFill>
                   <a:srgbClr val="737373"/>
                 </a:solidFill>
-                <a:latin typeface="Arial"/>
+                <a:latin typeface="Arial" panose="020B0604020202090204"/>
                 <a:ea typeface="微软雅黑"/>
               </a:rPr>
-              <a:t>01 卡片标签</a:t>
-            </a:r>
-          </a:p>
-        </p:txBody>
-      </p:sp>
-      <p:sp>
-        <p:nvSpPr>
-          <p:cNvPr id="9" name="TextBox 8"/>
+              <a:t>02 卡片标签</a:t>
+            </a:r>
+            <a:endParaRPr sz="950" b="0" i="0" spc="110">
+              <a:solidFill>
+                <a:srgbClr val="737373"/>
+              </a:solidFill>
+              <a:latin typeface="Arial" panose="020B0604020202090204"/>
+              <a:ea typeface="微软雅黑"/>
+            </a:endParaRPr>
+          </a:p>
+        </p:txBody>
+      </p:sp>
+      <p:sp>
+        <p:nvSpPr>
+          <p:cNvPr id="13" name="TextBox 12"/>
           <p:cNvSpPr txBox="1"/>
           <p:nvPr/>
         </p:nvSpPr>
         <p:spPr>
           <a:xfrm>
-            <a:off x="704088" y="2743200"/>
+            <a:off x="4526279" y="2743200"/>
             <a:ext cx="3200400" cy="365760"/>
           </a:xfrm>
           <a:prstGeom prst="rect">
@@ -3756,7 +3953,7 @@
           <a:noFill/>
         </p:spPr>
         <p:txBody>
-          <a:bodyPr wrap="square" anchor="t" lIns="0" rIns="0" tIns="0" bIns="0">
+          <a:bodyPr wrap="square" lIns="0" tIns="0" rIns="0" bIns="0" anchor="t">
             <a:spAutoFit/>
           </a:bodyPr>
           <a:lstStyle/>
@@ -3767,23 +3964,30 @@
                 <a:solidFill>
                   <a:srgbClr val="0A0A0A"/>
                 </a:solidFill>
-                <a:latin typeface="Arial"/>
+                <a:latin typeface="Arial" panose="020B0604020202090204"/>
                 <a:ea typeface="微软雅黑"/>
               </a:rPr>
               <a:t>卡片标题占位</a:t>
             </a:r>
-          </a:p>
-        </p:txBody>
-      </p:sp>
-      <p:sp>
-        <p:nvSpPr>
-          <p:cNvPr id="10" name="TextBox 9"/>
+            <a:endParaRPr sz="1500" b="0" i="0">
+              <a:solidFill>
+                <a:srgbClr val="0A0A0A"/>
+              </a:solidFill>
+              <a:latin typeface="Arial" panose="020B0604020202090204"/>
+              <a:ea typeface="微软雅黑"/>
+            </a:endParaRPr>
+          </a:p>
+        </p:txBody>
+      </p:sp>
+      <p:sp>
+        <p:nvSpPr>
+          <p:cNvPr id="14" name="TextBox 13"/>
           <p:cNvSpPr txBox="1"/>
           <p:nvPr/>
         </p:nvSpPr>
         <p:spPr>
           <a:xfrm>
-            <a:off x="704088" y="3246120"/>
+            <a:off x="4526279" y="3246120"/>
             <a:ext cx="3200400" cy="914400"/>
           </a:xfrm>
           <a:prstGeom prst="rect">
@@ -3792,7 +3996,7 @@
           <a:noFill/>
         </p:spPr>
         <p:txBody>
-          <a:bodyPr wrap="square" anchor="t" lIns="0" rIns="0" tIns="0" bIns="0">
+          <a:bodyPr wrap="square" lIns="0" tIns="0" rIns="0" bIns="0" anchor="t">
             <a:spAutoFit/>
           </a:bodyPr>
           <a:lstStyle/>
@@ -3807,23 +4011,30 @@
                 <a:solidFill>
                   <a:srgbClr val="444444"/>
                 </a:solidFill>
-                <a:latin typeface="Arial"/>
+                <a:latin typeface="Arial" panose="020B0604020202090204"/>
                 <a:ea typeface="微软雅黑"/>
               </a:rPr>
               <a:t>正文占位。瑞士风：直角纯色块 + 无衬线 + 单一 IKB 强调色 + 发丝线。</a:t>
             </a:r>
-          </a:p>
-        </p:txBody>
-      </p:sp>
-      <p:sp>
-        <p:nvSpPr>
-          <p:cNvPr id="11" name="Rectangle 10"/>
+            <a:endParaRPr sz="1000" b="0" i="0">
+              <a:solidFill>
+                <a:srgbClr val="444444"/>
+              </a:solidFill>
+              <a:latin typeface="Arial" panose="020B0604020202090204"/>
+              <a:ea typeface="微软雅黑"/>
+            </a:endParaRPr>
+          </a:p>
+        </p:txBody>
+      </p:sp>
+      <p:sp>
+        <p:nvSpPr>
+          <p:cNvPr id="15" name="Rectangle 14"/>
           <p:cNvSpPr/>
           <p:nvPr/>
         </p:nvSpPr>
         <p:spPr>
           <a:xfrm>
-            <a:off x="4325112" y="2194560"/>
+            <a:off x="8147304" y="2194560"/>
             <a:ext cx="3566160" cy="2194560"/>
           </a:xfrm>
           <a:prstGeom prst="rect">
@@ -3861,13 +4072,13 @@
       </p:sp>
       <p:sp>
         <p:nvSpPr>
-          <p:cNvPr id="12" name="TextBox 11"/>
+          <p:cNvPr id="16" name="TextBox 15"/>
           <p:cNvSpPr txBox="1"/>
           <p:nvPr/>
         </p:nvSpPr>
         <p:spPr>
           <a:xfrm>
-            <a:off x="4526279" y="2395728"/>
+            <a:off x="8348472" y="2395728"/>
             <a:ext cx="3200400" cy="274320"/>
           </a:xfrm>
           <a:prstGeom prst="rect">
@@ -3876,7 +4087,7 @@
           <a:noFill/>
         </p:spPr>
         <p:txBody>
-          <a:bodyPr wrap="square" anchor="t" lIns="0" rIns="0" tIns="0" bIns="0">
+          <a:bodyPr wrap="square" lIns="0" tIns="0" rIns="0" bIns="0" anchor="t">
             <a:spAutoFit/>
           </a:bodyPr>
           <a:lstStyle/>
@@ -3887,23 +4098,30 @@
                 <a:solidFill>
                   <a:srgbClr val="737373"/>
                 </a:solidFill>
-                <a:latin typeface="Arial"/>
+                <a:latin typeface="Arial" panose="020B0604020202090204"/>
                 <a:ea typeface="微软雅黑"/>
               </a:rPr>
-              <a:t>02 卡片标签</a:t>
-            </a:r>
-          </a:p>
-        </p:txBody>
-      </p:sp>
-      <p:sp>
-        <p:nvSpPr>
-          <p:cNvPr id="13" name="TextBox 12"/>
+              <a:t>03 卡片标签</a:t>
+            </a:r>
+            <a:endParaRPr sz="950" b="0" i="0" spc="110">
+              <a:solidFill>
+                <a:srgbClr val="737373"/>
+              </a:solidFill>
+              <a:latin typeface="Arial" panose="020B0604020202090204"/>
+              <a:ea typeface="微软雅黑"/>
+            </a:endParaRPr>
+          </a:p>
+        </p:txBody>
+      </p:sp>
+      <p:sp>
+        <p:nvSpPr>
+          <p:cNvPr id="17" name="TextBox 16"/>
           <p:cNvSpPr txBox="1"/>
           <p:nvPr/>
         </p:nvSpPr>
         <p:spPr>
           <a:xfrm>
-            <a:off x="4526279" y="2743200"/>
+            <a:off x="8348472" y="2743200"/>
             <a:ext cx="3200400" cy="365760"/>
           </a:xfrm>
           <a:prstGeom prst="rect">
@@ -3912,7 +4130,7 @@
           <a:noFill/>
         </p:spPr>
         <p:txBody>
-          <a:bodyPr wrap="square" anchor="t" lIns="0" rIns="0" tIns="0" bIns="0">
+          <a:bodyPr wrap="square" lIns="0" tIns="0" rIns="0" bIns="0" anchor="t">
             <a:spAutoFit/>
           </a:bodyPr>
           <a:lstStyle/>
@@ -3923,23 +4141,30 @@
                 <a:solidFill>
                   <a:srgbClr val="0A0A0A"/>
                 </a:solidFill>
-                <a:latin typeface="Arial"/>
+                <a:latin typeface="Arial" panose="020B0604020202090204"/>
                 <a:ea typeface="微软雅黑"/>
               </a:rPr>
               <a:t>卡片标题占位</a:t>
             </a:r>
-          </a:p>
-        </p:txBody>
-      </p:sp>
-      <p:sp>
-        <p:nvSpPr>
-          <p:cNvPr id="14" name="TextBox 13"/>
+            <a:endParaRPr sz="1500" b="0" i="0">
+              <a:solidFill>
+                <a:srgbClr val="0A0A0A"/>
+              </a:solidFill>
+              <a:latin typeface="Arial" panose="020B0604020202090204"/>
+              <a:ea typeface="微软雅黑"/>
+            </a:endParaRPr>
+          </a:p>
+        </p:txBody>
+      </p:sp>
+      <p:sp>
+        <p:nvSpPr>
+          <p:cNvPr id="18" name="TextBox 17"/>
           <p:cNvSpPr txBox="1"/>
           <p:nvPr/>
         </p:nvSpPr>
         <p:spPr>
           <a:xfrm>
-            <a:off x="4526279" y="3246120"/>
+            <a:off x="8348472" y="3246120"/>
             <a:ext cx="3200400" cy="914400"/>
           </a:xfrm>
           <a:prstGeom prst="rect">
@@ -3948,7 +4173,7 @@
           <a:noFill/>
         </p:spPr>
         <p:txBody>
-          <a:bodyPr wrap="square" anchor="t" lIns="0" rIns="0" tIns="0" bIns="0">
+          <a:bodyPr wrap="square" lIns="0" tIns="0" rIns="0" bIns="0" anchor="t">
             <a:spAutoFit/>
           </a:bodyPr>
           <a:lstStyle/>
@@ -3963,30 +4188,102 @@
                 <a:solidFill>
                   <a:srgbClr val="444444"/>
                 </a:solidFill>
-                <a:latin typeface="Arial"/>
+                <a:latin typeface="Arial" panose="020B0604020202090204"/>
                 <a:ea typeface="微软雅黑"/>
               </a:rPr>
               <a:t>正文占位。瑞士风：直角纯色块 + 无衬线 + 单一 IKB 强调色 + 发丝线。</a:t>
             </a:r>
-          </a:p>
-        </p:txBody>
-      </p:sp>
-      <p:sp>
-        <p:nvSpPr>
-          <p:cNvPr id="15" name="Rectangle 14"/>
+            <a:endParaRPr sz="1000" b="0" i="0">
+              <a:solidFill>
+                <a:srgbClr val="444444"/>
+              </a:solidFill>
+              <a:latin typeface="Arial" panose="020B0604020202090204"/>
+              <a:ea typeface="微软雅黑"/>
+            </a:endParaRPr>
+          </a:p>
+        </p:txBody>
+      </p:sp>
+      <p:sp>
+        <p:nvSpPr>
+          <p:cNvPr id="19" name="TextBox 18"/>
+          <p:cNvSpPr txBox="1"/>
+          <p:nvPr/>
+        </p:nvSpPr>
+        <p:spPr>
+          <a:xfrm>
+            <a:off x="502920" y="6327648"/>
+            <a:ext cx="11183112" cy="457200"/>
+          </a:xfrm>
+          <a:prstGeom prst="rect">
+            <a:avLst/>
+          </a:prstGeom>
+          <a:noFill/>
+        </p:spPr>
+        <p:txBody>
+          <a:bodyPr wrap="square" lIns="0" tIns="0" rIns="0" bIns="0" anchor="t">
+            <a:spAutoFit/>
+          </a:bodyPr>
+          <a:lstStyle/>
+          <a:p>
+            <a:pPr algn="l">
+              <a:lnSpc>
+                <a:spcPct val="120000"/>
+              </a:lnSpc>
+            </a:pPr>
+            <a:r>
+              <a:rPr sz="900" b="0" i="0">
+                <a:solidFill>
+                  <a:srgbClr val="737373"/>
+                </a:solidFill>
+                <a:latin typeface="Arial" panose="020B0604020202090204"/>
+                <a:ea typeface="微软雅黑"/>
+              </a:rPr>
+              <a:t>来源脚注版式 · 数据来源统一放这里，9pt 灰字</a:t>
+            </a:r>
+            <a:endParaRPr sz="900" b="0" i="0">
+              <a:solidFill>
+                <a:srgbClr val="737373"/>
+              </a:solidFill>
+              <a:latin typeface="Arial" panose="020B0604020202090204"/>
+              <a:ea typeface="微软雅黑"/>
+            </a:endParaRPr>
+          </a:p>
+        </p:txBody>
+      </p:sp>
+    </p:spTree>
+  </p:cSld>
+  <p:clrMapOvr>
+    <a:masterClrMapping/>
+  </p:clrMapOvr>
+</p:sld>
+</file>
+
+<file path=ppt/slides/slide3.xml><?xml version="1.0" encoding="utf-8"?>
+<p:sld xmlns:a="http://schemas.openxmlformats.org/drawingml/2006/main" xmlns:r="http://schemas.openxmlformats.org/officeDocument/2006/relationships" xmlns:p="http://schemas.openxmlformats.org/presentationml/2006/main">
+  <p:cSld>
+    <p:spTree>
+      <p:nvGrpSpPr>
+        <p:cNvPr id="1" name=""/>
+        <p:cNvGrpSpPr/>
+        <p:nvPr/>
+      </p:nvGrpSpPr>
+      <p:grpSpPr/>
+      <p:sp>
+        <p:nvSpPr>
+          <p:cNvPr id="2" name="Rectangle 1"/>
           <p:cNvSpPr/>
           <p:nvPr/>
         </p:nvSpPr>
         <p:spPr>
           <a:xfrm>
-            <a:off x="8147304" y="2194560"/>
-            <a:ext cx="3566160" cy="2194560"/>
+            <a:off x="0" y="0"/>
+            <a:ext cx="12191695" cy="6858000"/>
           </a:xfrm>
           <a:prstGeom prst="rect">
             <a:avLst/>
           </a:prstGeom>
           <a:solidFill>
-            <a:srgbClr val="F5F5F4"/>
+            <a:srgbClr val="0A0A0A"/>
           </a:solidFill>
           <a:ln>
             <a:noFill/>
@@ -4017,14 +4314,14 @@
       </p:sp>
       <p:sp>
         <p:nvSpPr>
-          <p:cNvPr id="16" name="TextBox 15"/>
+          <p:cNvPr id="3" name="TextBox 2"/>
           <p:cNvSpPr txBox="1"/>
           <p:nvPr/>
         </p:nvSpPr>
         <p:spPr>
           <a:xfrm>
-            <a:off x="8348472" y="2395728"/>
-            <a:ext cx="3200400" cy="274320"/>
+            <a:off x="502920" y="329184"/>
+            <a:ext cx="7315200" cy="274320"/>
           </a:xfrm>
           <a:prstGeom prst="rect">
             <a:avLst/>
@@ -4032,35 +4329,42 @@
           <a:noFill/>
         </p:spPr>
         <p:txBody>
-          <a:bodyPr wrap="square" anchor="t" lIns="0" rIns="0" tIns="0" bIns="0">
+          <a:bodyPr wrap="square" lIns="0" tIns="0" rIns="0" bIns="0" anchor="t">
             <a:spAutoFit/>
           </a:bodyPr>
           <a:lstStyle/>
           <a:p>
             <a:pPr algn="l"/>
             <a:r>
-              <a:rPr sz="950" b="0" i="0" spc="110">
-                <a:solidFill>
-                  <a:srgbClr val="737373"/>
-                </a:solidFill>
-                <a:latin typeface="Arial"/>
+              <a:rPr sz="950" b="0" i="0" spc="120">
+                <a:solidFill>
+                  <a:srgbClr val="FFFFFF"/>
+                </a:solidFill>
+                <a:latin typeface="Arial" panose="020B0604020202090204"/>
                 <a:ea typeface="微软雅黑"/>
               </a:rPr>
-              <a:t>03 卡片标签</a:t>
-            </a:r>
-          </a:p>
-        </p:txBody>
-      </p:sp>
-      <p:sp>
-        <p:nvSpPr>
-          <p:cNvPr id="17" name="TextBox 16"/>
+              <a:t>深色内容版式 · DARK LAYOUT</a:t>
+            </a:r>
+            <a:endParaRPr sz="950" b="0" i="0" spc="120">
+              <a:solidFill>
+                <a:srgbClr val="FFFFFF"/>
+              </a:solidFill>
+              <a:latin typeface="Arial" panose="020B0604020202090204"/>
+              <a:ea typeface="微软雅黑"/>
+            </a:endParaRPr>
+          </a:p>
+        </p:txBody>
+      </p:sp>
+      <p:sp>
+        <p:nvSpPr>
+          <p:cNvPr id="4" name="TextBox 3"/>
           <p:cNvSpPr txBox="1"/>
           <p:nvPr/>
         </p:nvSpPr>
         <p:spPr>
           <a:xfrm>
-            <a:off x="8348472" y="2743200"/>
-            <a:ext cx="3200400" cy="365760"/>
+            <a:off x="5790895" y="329184"/>
+            <a:ext cx="5897880" cy="274320"/>
           </a:xfrm>
           <a:prstGeom prst="rect">
             <a:avLst/>
@@ -4068,35 +4372,42 @@
           <a:noFill/>
         </p:spPr>
         <p:txBody>
-          <a:bodyPr wrap="square" anchor="t" lIns="0" rIns="0" tIns="0" bIns="0">
+          <a:bodyPr wrap="square" lIns="0" tIns="0" rIns="0" bIns="0" anchor="t">
             <a:spAutoFit/>
           </a:bodyPr>
           <a:lstStyle/>
           <a:p>
-            <a:pPr algn="l"/>
-            <a:r>
-              <a:rPr sz="1500" b="0" i="0">
-                <a:solidFill>
-                  <a:srgbClr val="0A0A0A"/>
-                </a:solidFill>
-                <a:latin typeface="Arial"/>
+            <a:pPr algn="r"/>
+            <a:r>
+              <a:rPr sz="950" b="0" i="0" spc="120">
+                <a:solidFill>
+                  <a:srgbClr val="FFFFFF"/>
+                </a:solidFill>
+                <a:latin typeface="Arial" panose="020B0604020202090204"/>
                 <a:ea typeface="微软雅黑"/>
               </a:rPr>
-              <a:t>卡片标题占位</a:t>
-            </a:r>
-          </a:p>
-        </p:txBody>
-      </p:sp>
-      <p:sp>
-        <p:nvSpPr>
-          <p:cNvPr id="18" name="TextBox 17"/>
+              <a:t>LAYOUT / DARK</a:t>
+            </a:r>
+            <a:endParaRPr sz="950" b="0" i="0" spc="120">
+              <a:solidFill>
+                <a:srgbClr val="FFFFFF"/>
+              </a:solidFill>
+              <a:latin typeface="Arial" panose="020B0604020202090204"/>
+              <a:ea typeface="微软雅黑"/>
+            </a:endParaRPr>
+          </a:p>
+        </p:txBody>
+      </p:sp>
+      <p:sp>
+        <p:nvSpPr>
+          <p:cNvPr id="5" name="TextBox 4"/>
           <p:cNvSpPr txBox="1"/>
           <p:nvPr/>
         </p:nvSpPr>
         <p:spPr>
           <a:xfrm>
-            <a:off x="8348472" y="3246120"/>
-            <a:ext cx="3200400" cy="914400"/>
+            <a:off x="502920" y="731520"/>
+            <a:ext cx="8229600" cy="274320"/>
           </a:xfrm>
           <a:prstGeom prst="rect">
             <a:avLst/>
@@ -4104,103 +4415,95 @@
           <a:noFill/>
         </p:spPr>
         <p:txBody>
-          <a:bodyPr wrap="square" anchor="t" lIns="0" rIns="0" tIns="0" bIns="0">
+          <a:bodyPr wrap="square" lIns="0" tIns="0" rIns="0" bIns="0" anchor="t">
             <a:spAutoFit/>
           </a:bodyPr>
           <a:lstStyle/>
           <a:p>
-            <a:pPr algn="l">
+            <a:pPr algn="l"/>
+            <a:r>
+              <a:rPr sz="1050" b="1" i="0" spc="150">
+                <a:solidFill>
+                  <a:srgbClr val="5B7BFF"/>
+                </a:solidFill>
+                <a:latin typeface="Arial" panose="020B0604020202090204"/>
+                <a:ea typeface="微软雅黑"/>
+              </a:rPr>
+              <a:t>KICKER</a:t>
+            </a:r>
+            <a:endParaRPr sz="1050" b="1" i="0" spc="150">
+              <a:solidFill>
+                <a:srgbClr val="5B7BFF"/>
+              </a:solidFill>
+              <a:latin typeface="Arial" panose="020B0604020202090204"/>
+              <a:ea typeface="微软雅黑"/>
+            </a:endParaRPr>
+          </a:p>
+        </p:txBody>
+      </p:sp>
+      <p:sp>
+        <p:nvSpPr>
+          <p:cNvPr id="6" name="TextBox 5"/>
+          <p:cNvSpPr txBox="1"/>
+          <p:nvPr/>
+        </p:nvSpPr>
+        <p:spPr>
+          <a:xfrm>
+            <a:off x="502920" y="1005840"/>
+            <a:ext cx="11155680" cy="1097280"/>
+          </a:xfrm>
+          <a:prstGeom prst="rect">
+            <a:avLst/>
+          </a:prstGeom>
+          <a:noFill/>
+        </p:spPr>
+        <p:txBody>
+          <a:bodyPr wrap="square" lIns="0" tIns="0" rIns="0" bIns="0" anchor="t">
+            <a:spAutoFit/>
+          </a:bodyPr>
+          <a:lstStyle/>
+          <a:p>
+            <a:pPr>
               <a:lnSpc>
-                <a:spcPct val="135000"/>
+                <a:spcPct val="105000"/>
               </a:lnSpc>
             </a:pPr>
             <a:r>
-              <a:rPr sz="1000" b="0" i="0">
-                <a:solidFill>
-                  <a:srgbClr val="444444"/>
-                </a:solidFill>
-                <a:latin typeface="Arial"/>
+              <a:rPr sz="2400" b="0" i="0">
+                <a:solidFill>
+                  <a:srgbClr val="FFFFFF"/>
+                </a:solidFill>
+                <a:latin typeface="Arial" panose="020B0604020202090204"/>
                 <a:ea typeface="微软雅黑"/>
               </a:rPr>
-              <a:t>正文占位。瑞士风：直角纯色块 + 无衬线 + 单一 IKB 强调色 + 发丝线。</a:t>
-            </a:r>
-          </a:p>
-        </p:txBody>
-      </p:sp>
-      <p:sp>
-        <p:nvSpPr>
-          <p:cNvPr id="19" name="TextBox 18"/>
-          <p:cNvSpPr txBox="1"/>
-          <p:nvPr/>
-        </p:nvSpPr>
-        <p:spPr>
-          <a:xfrm>
-            <a:off x="502920" y="6327648"/>
-            <a:ext cx="11183112" cy="457200"/>
-          </a:xfrm>
-          <a:prstGeom prst="rect">
-            <a:avLst/>
-          </a:prstGeom>
-          <a:noFill/>
-        </p:spPr>
-        <p:txBody>
-          <a:bodyPr wrap="square" anchor="t" lIns="0" rIns="0" tIns="0" bIns="0">
-            <a:spAutoFit/>
-          </a:bodyPr>
-          <a:lstStyle/>
-          <a:p>
-            <a:pPr algn="l">
-              <a:lnSpc>
-                <a:spcPct val="120000"/>
-              </a:lnSpc>
-            </a:pPr>
-            <a:r>
-              <a:rPr sz="900" b="0" i="0">
-                <a:solidFill>
-                  <a:srgbClr val="737373"/>
-                </a:solidFill>
-                <a:latin typeface="Arial"/>
-                <a:ea typeface="微软雅黑"/>
-              </a:rPr>
-              <a:t>来源脚注版式 · 数据来源统一放这里，9pt 灰字</a:t>
-            </a:r>
-          </a:p>
-        </p:txBody>
-      </p:sp>
-    </p:spTree>
-  </p:cSld>
-  <p:clrMapOvr>
-    <a:masterClrMapping/>
-  </p:clrMapOvr>
-</p:sld>
-</file>
-
-<file path=ppt/slides/slide3.xml><?xml version="1.0" encoding="utf-8"?>
-<p:sld xmlns:a="http://schemas.openxmlformats.org/drawingml/2006/main" xmlns:p="http://schemas.openxmlformats.org/presentationml/2006/main" xmlns:r="http://schemas.openxmlformats.org/officeDocument/2006/relationships">
-  <p:cSld>
-    <p:spTree>
-      <p:nvGrpSpPr>
-        <p:cNvPr id="1" name=""/>
-        <p:cNvGrpSpPr/>
-        <p:nvPr/>
-      </p:nvGrpSpPr>
-      <p:grpSpPr/>
-      <p:sp>
-        <p:nvSpPr>
-          <p:cNvPr id="2" name="Rectangle 1"/>
+              <a:t>深色页用于痛点/技术/护城河/竞争/融资</a:t>
+            </a:r>
+            <a:endParaRPr sz="2400" b="0" i="0">
+              <a:solidFill>
+                <a:srgbClr val="FFFFFF"/>
+              </a:solidFill>
+              <a:latin typeface="Arial" panose="020B0604020202090204"/>
+              <a:ea typeface="微软雅黑"/>
+            </a:endParaRPr>
+          </a:p>
+        </p:txBody>
+      </p:sp>
+      <p:sp>
+        <p:nvSpPr>
+          <p:cNvPr id="7" name="Rectangle 6"/>
           <p:cNvSpPr/>
           <p:nvPr/>
         </p:nvSpPr>
         <p:spPr>
           <a:xfrm>
-            <a:off x="0" y="0"/>
-            <a:ext cx="12191695" cy="6858000"/>
+            <a:off x="502920" y="2377440"/>
+            <a:ext cx="5394960" cy="2011680"/>
           </a:xfrm>
           <a:prstGeom prst="rect">
             <a:avLst/>
           </a:prstGeom>
           <a:solidFill>
-            <a:srgbClr val="0A0A0A"/>
+            <a:srgbClr val="F5F5F4"/>
           </a:solidFill>
           <a:ln>
             <a:noFill/>
@@ -4231,14 +4534,14 @@
       </p:sp>
       <p:sp>
         <p:nvSpPr>
-          <p:cNvPr id="3" name="TextBox 2"/>
+          <p:cNvPr id="8" name="TextBox 7"/>
           <p:cNvSpPr txBox="1"/>
           <p:nvPr/>
         </p:nvSpPr>
         <p:spPr>
           <a:xfrm>
-            <a:off x="502920" y="329184"/>
-            <a:ext cx="7315200" cy="274320"/>
+            <a:off x="704088" y="2578608"/>
+            <a:ext cx="5029200" cy="365760"/>
           </a:xfrm>
           <a:prstGeom prst="rect">
             <a:avLst/>
@@ -4246,153 +4549,48 @@
           <a:noFill/>
         </p:spPr>
         <p:txBody>
-          <a:bodyPr wrap="square" anchor="t" lIns="0" rIns="0" tIns="0" bIns="0">
+          <a:bodyPr wrap="square" lIns="0" tIns="0" rIns="0" bIns="0" anchor="t">
             <a:spAutoFit/>
           </a:bodyPr>
           <a:lstStyle/>
           <a:p>
             <a:pPr algn="l"/>
             <a:r>
-              <a:rPr sz="950" b="0" i="0" spc="120">
-                <a:solidFill>
-                  <a:srgbClr val="FFFFFF"/>
-                </a:solidFill>
-                <a:latin typeface="Arial"/>
+              <a:rPr sz="1200" b="0" i="0">
+                <a:solidFill>
+                  <a:srgbClr val="0A0A0A"/>
+                </a:solidFill>
+                <a:latin typeface="Arial" panose="020B0604020202090204"/>
                 <a:ea typeface="微软雅黑"/>
               </a:rPr>
-              <a:t>深色内容版式 · DARK LAYOUT</a:t>
-            </a:r>
-          </a:p>
-        </p:txBody>
-      </p:sp>
-      <p:sp>
-        <p:nvSpPr>
-          <p:cNvPr id="4" name="TextBox 3"/>
-          <p:cNvSpPr txBox="1"/>
-          <p:nvPr/>
-        </p:nvSpPr>
-        <p:spPr>
-          <a:xfrm>
-            <a:off x="5790895" y="329184"/>
-            <a:ext cx="5897880" cy="274320"/>
-          </a:xfrm>
-          <a:prstGeom prst="rect">
-            <a:avLst/>
-          </a:prstGeom>
-          <a:noFill/>
-        </p:spPr>
-        <p:txBody>
-          <a:bodyPr wrap="square" anchor="t" lIns="0" rIns="0" tIns="0" bIns="0">
-            <a:spAutoFit/>
-          </a:bodyPr>
-          <a:lstStyle/>
-          <a:p>
-            <a:pPr algn="r"/>
-            <a:r>
-              <a:rPr sz="950" b="0" i="0" spc="120">
-                <a:solidFill>
-                  <a:srgbClr val="FFFFFF"/>
-                </a:solidFill>
-                <a:latin typeface="Arial"/>
-                <a:ea typeface="微软雅黑"/>
-              </a:rPr>
-              <a:t>LAYOUT / DARK</a:t>
-            </a:r>
-          </a:p>
-        </p:txBody>
-      </p:sp>
-      <p:sp>
-        <p:nvSpPr>
-          <p:cNvPr id="5" name="TextBox 4"/>
-          <p:cNvSpPr txBox="1"/>
-          <p:nvPr/>
-        </p:nvSpPr>
-        <p:spPr>
-          <a:xfrm>
-            <a:off x="502920" y="731520"/>
-            <a:ext cx="8229600" cy="274320"/>
-          </a:xfrm>
-          <a:prstGeom prst="rect">
-            <a:avLst/>
-          </a:prstGeom>
-          <a:noFill/>
-        </p:spPr>
-        <p:txBody>
-          <a:bodyPr wrap="square" anchor="t" lIns="0" rIns="0" tIns="0" bIns="0">
-            <a:spAutoFit/>
-          </a:bodyPr>
-          <a:lstStyle/>
-          <a:p>
-            <a:pPr algn="l"/>
-            <a:r>
-              <a:rPr sz="1050" b="1" i="0" spc="150">
-                <a:solidFill>
-                  <a:srgbClr val="5B7BFF"/>
-                </a:solidFill>
-                <a:latin typeface="Arial"/>
-                <a:ea typeface="微软雅黑"/>
-              </a:rPr>
-              <a:t>KICKER</a:t>
-            </a:r>
-          </a:p>
-        </p:txBody>
-      </p:sp>
-      <p:sp>
-        <p:nvSpPr>
-          <p:cNvPr id="6" name="TextBox 5"/>
-          <p:cNvSpPr txBox="1"/>
-          <p:nvPr/>
-        </p:nvSpPr>
-        <p:spPr>
-          <a:xfrm>
-            <a:off x="502920" y="1005840"/>
-            <a:ext cx="11155680" cy="1097280"/>
-          </a:xfrm>
-          <a:prstGeom prst="rect">
-            <a:avLst/>
-          </a:prstGeom>
-          <a:noFill/>
-        </p:spPr>
-        <p:txBody>
-          <a:bodyPr wrap="square" anchor="t" lIns="0" rIns="0" tIns="0" bIns="0">
-            <a:spAutoFit/>
-          </a:bodyPr>
-          <a:lstStyle/>
-          <a:p>
-            <a:pPr>
-              <a:lnSpc>
-                <a:spcPct val="105000"/>
-              </a:lnSpc>
-            </a:pPr>
-            <a:r>
-              <a:rPr sz="2400" b="0" i="0">
-                <a:solidFill>
-                  <a:srgbClr val="FFFFFF"/>
-                </a:solidFill>
-                <a:latin typeface="Arial"/>
-                <a:ea typeface="微软雅黑"/>
-              </a:rPr>
-              <a:t>深色页用于痛点/技术/护城河/竞争/融资</a:t>
-            </a:r>
-          </a:p>
-        </p:txBody>
-      </p:sp>
-      <p:sp>
-        <p:nvSpPr>
-          <p:cNvPr id="7" name="Rectangle 6"/>
+              <a:t>浅色卡片（灰底黑字）</a:t>
+            </a:r>
+            <a:endParaRPr sz="1200" b="0" i="0">
+              <a:solidFill>
+                <a:srgbClr val="0A0A0A"/>
+              </a:solidFill>
+              <a:latin typeface="Arial" panose="020B0604020202090204"/>
+              <a:ea typeface="微软雅黑"/>
+            </a:endParaRPr>
+          </a:p>
+        </p:txBody>
+      </p:sp>
+      <p:sp>
+        <p:nvSpPr>
+          <p:cNvPr id="9" name="Rectangle 8"/>
           <p:cNvSpPr/>
           <p:nvPr/>
         </p:nvSpPr>
         <p:spPr>
           <a:xfrm>
-            <a:off x="502920" y="2377440"/>
+            <a:off x="6172200" y="2377440"/>
             <a:ext cx="5394960" cy="2011680"/>
           </a:xfrm>
           <a:prstGeom prst="rect">
             <a:avLst/>
           </a:prstGeom>
           <a:solidFill>
-            <a:srgbClr val="F5F5F4"/>
+            <a:srgbClr val="002FA7"/>
           </a:solidFill>
           <a:ln>
             <a:noFill/>
@@ -4423,13 +4621,13 @@
       </p:sp>
       <p:sp>
         <p:nvSpPr>
-          <p:cNvPr id="8" name="TextBox 7"/>
+          <p:cNvPr id="10" name="TextBox 9"/>
           <p:cNvSpPr txBox="1"/>
           <p:nvPr/>
         </p:nvSpPr>
         <p:spPr>
           <a:xfrm>
-            <a:off x="704088" y="2578608"/>
+            <a:off x="6373368" y="2578608"/>
             <a:ext cx="5029200" cy="365760"/>
           </a:xfrm>
           <a:prstGeom prst="rect">
@@ -4438,7 +4636,7 @@
           <a:noFill/>
         </p:spPr>
         <p:txBody>
-          <a:bodyPr wrap="square" anchor="t" lIns="0" rIns="0" tIns="0" bIns="0">
+          <a:bodyPr wrap="square" lIns="0" tIns="0" rIns="0" bIns="0" anchor="t">
             <a:spAutoFit/>
           </a:bodyPr>
           <a:lstStyle/>
@@ -4447,26 +4645,98 @@
             <a:r>
               <a:rPr sz="1200" b="0" i="0">
                 <a:solidFill>
-                  <a:srgbClr val="0A0A0A"/>
-                </a:solidFill>
-                <a:latin typeface="Arial"/>
+                  <a:srgbClr val="FFFFFF"/>
+                </a:solidFill>
+                <a:latin typeface="Arial" panose="020B0604020202090204"/>
                 <a:ea typeface="微软雅黑"/>
               </a:rPr>
-              <a:t>浅色卡片（灰底黑字）</a:t>
-            </a:r>
-          </a:p>
-        </p:txBody>
-      </p:sp>
-      <p:sp>
-        <p:nvSpPr>
-          <p:cNvPr id="9" name="Rectangle 8"/>
+              <a:t>IKB 强调卡（蓝底白字）</a:t>
+            </a:r>
+            <a:endParaRPr sz="1200" b="0" i="0">
+              <a:solidFill>
+                <a:srgbClr val="FFFFFF"/>
+              </a:solidFill>
+              <a:latin typeface="Arial" panose="020B0604020202090204"/>
+              <a:ea typeface="微软雅黑"/>
+            </a:endParaRPr>
+          </a:p>
+        </p:txBody>
+      </p:sp>
+      <p:sp>
+        <p:nvSpPr>
+          <p:cNvPr id="11" name="TextBox 10"/>
+          <p:cNvSpPr txBox="1"/>
+          <p:nvPr/>
+        </p:nvSpPr>
+        <p:spPr>
+          <a:xfrm>
+            <a:off x="502920" y="6327648"/>
+            <a:ext cx="11183112" cy="457200"/>
+          </a:xfrm>
+          <a:prstGeom prst="rect">
+            <a:avLst/>
+          </a:prstGeom>
+          <a:noFill/>
+        </p:spPr>
+        <p:txBody>
+          <a:bodyPr wrap="square" lIns="0" tIns="0" rIns="0" bIns="0" anchor="t">
+            <a:spAutoFit/>
+          </a:bodyPr>
+          <a:lstStyle/>
+          <a:p>
+            <a:pPr algn="l">
+              <a:lnSpc>
+                <a:spcPct val="120000"/>
+              </a:lnSpc>
+            </a:pPr>
+            <a:r>
+              <a:rPr sz="900" b="0" i="0">
+                <a:solidFill>
+                  <a:srgbClr val="FFFFFF"/>
+                </a:solidFill>
+                <a:latin typeface="Arial" panose="020B0604020202090204"/>
+                <a:ea typeface="微软雅黑"/>
+              </a:rPr>
+              <a:t>深色页脚注版式 · 白色 62% 透明近似</a:t>
+            </a:r>
+            <a:endParaRPr sz="900" b="0" i="0">
+              <a:solidFill>
+                <a:srgbClr val="FFFFFF"/>
+              </a:solidFill>
+              <a:latin typeface="Arial" panose="020B0604020202090204"/>
+              <a:ea typeface="微软雅黑"/>
+            </a:endParaRPr>
+          </a:p>
+        </p:txBody>
+      </p:sp>
+    </p:spTree>
+  </p:cSld>
+  <p:clrMapOvr>
+    <a:masterClrMapping/>
+  </p:clrMapOvr>
+</p:sld>
+</file>
+
+<file path=ppt/slides/slide4.xml><?xml version="1.0" encoding="utf-8"?>
+<p:sld xmlns:a="http://schemas.openxmlformats.org/drawingml/2006/main" xmlns:r="http://schemas.openxmlformats.org/officeDocument/2006/relationships" xmlns:p="http://schemas.openxmlformats.org/presentationml/2006/main">
+  <p:cSld>
+    <p:spTree>
+      <p:nvGrpSpPr>
+        <p:cNvPr id="1" name=""/>
+        <p:cNvGrpSpPr/>
+        <p:nvPr/>
+      </p:nvGrpSpPr>
+      <p:grpSpPr/>
+      <p:sp>
+        <p:nvSpPr>
+          <p:cNvPr id="2" name="Rectangle 1"/>
           <p:cNvSpPr/>
           <p:nvPr/>
         </p:nvSpPr>
         <p:spPr>
           <a:xfrm>
-            <a:off x="6172200" y="2377440"/>
-            <a:ext cx="5394960" cy="2011680"/>
+            <a:off x="0" y="0"/>
+            <a:ext cx="12191695" cy="6858000"/>
           </a:xfrm>
           <a:prstGeom prst="rect">
             <a:avLst/>
@@ -4503,114 +4773,20 @@
       </p:sp>
       <p:sp>
         <p:nvSpPr>
-          <p:cNvPr id="10" name="TextBox 9"/>
-          <p:cNvSpPr txBox="1"/>
-          <p:nvPr/>
-        </p:nvSpPr>
-        <p:spPr>
-          <a:xfrm>
-            <a:off x="6373368" y="2578608"/>
-            <a:ext cx="5029200" cy="365760"/>
-          </a:xfrm>
-          <a:prstGeom prst="rect">
-            <a:avLst/>
-          </a:prstGeom>
-          <a:noFill/>
-        </p:spPr>
-        <p:txBody>
-          <a:bodyPr wrap="square" anchor="t" lIns="0" rIns="0" tIns="0" bIns="0">
-            <a:spAutoFit/>
-          </a:bodyPr>
-          <a:lstStyle/>
-          <a:p>
-            <a:pPr algn="l"/>
-            <a:r>
-              <a:rPr sz="1200" b="0" i="0">
-                <a:solidFill>
-                  <a:srgbClr val="FFFFFF"/>
-                </a:solidFill>
-                <a:latin typeface="Arial"/>
-                <a:ea typeface="微软雅黑"/>
-              </a:rPr>
-              <a:t>IKB 强调卡（蓝底白字）</a:t>
-            </a:r>
-          </a:p>
-        </p:txBody>
-      </p:sp>
-      <p:sp>
-        <p:nvSpPr>
-          <p:cNvPr id="11" name="TextBox 10"/>
-          <p:cNvSpPr txBox="1"/>
-          <p:nvPr/>
-        </p:nvSpPr>
-        <p:spPr>
-          <a:xfrm>
-            <a:off x="502920" y="6327648"/>
-            <a:ext cx="11183112" cy="457200"/>
-          </a:xfrm>
-          <a:prstGeom prst="rect">
-            <a:avLst/>
-          </a:prstGeom>
-          <a:noFill/>
-        </p:spPr>
-        <p:txBody>
-          <a:bodyPr wrap="square" anchor="t" lIns="0" rIns="0" tIns="0" bIns="0">
-            <a:spAutoFit/>
-          </a:bodyPr>
-          <a:lstStyle/>
-          <a:p>
-            <a:pPr algn="l">
-              <a:lnSpc>
-                <a:spcPct val="120000"/>
-              </a:lnSpc>
-            </a:pPr>
-            <a:r>
-              <a:rPr sz="900" b="0" i="0">
-                <a:solidFill>
-                  <a:srgbClr val="FFFFFF"/>
-                </a:solidFill>
-                <a:latin typeface="Arial"/>
-                <a:ea typeface="微软雅黑"/>
-              </a:rPr>
-              <a:t>深色页脚注版式 · 白色 62% 透明近似</a:t>
-            </a:r>
-          </a:p>
-        </p:txBody>
-      </p:sp>
-    </p:spTree>
-  </p:cSld>
-  <p:clrMapOvr>
-    <a:masterClrMapping/>
-  </p:clrMapOvr>
-</p:sld>
-</file>
-
-<file path=ppt/slides/slide4.xml><?xml version="1.0" encoding="utf-8"?>
-<p:sld xmlns:a="http://schemas.openxmlformats.org/drawingml/2006/main" xmlns:p="http://schemas.openxmlformats.org/presentationml/2006/main" xmlns:r="http://schemas.openxmlformats.org/officeDocument/2006/relationships">
-  <p:cSld>
-    <p:spTree>
-      <p:nvGrpSpPr>
-        <p:cNvPr id="1" name=""/>
-        <p:cNvGrpSpPr/>
-        <p:nvPr/>
-      </p:nvGrpSpPr>
-      <p:grpSpPr/>
-      <p:sp>
-        <p:nvSpPr>
-          <p:cNvPr id="2" name="Rectangle 1"/>
+          <p:cNvPr id="3" name="Rectangle 2"/>
           <p:cNvSpPr/>
           <p:nvPr/>
         </p:nvSpPr>
         <p:spPr>
           <a:xfrm>
-            <a:off x="0" y="0"/>
-            <a:ext cx="12191695" cy="6858000"/>
+            <a:off x="6096304" y="0"/>
+            <a:ext cx="6095390" cy="6858000"/>
           </a:xfrm>
           <a:prstGeom prst="rect">
             <a:avLst/>
           </a:prstGeom>
           <a:solidFill>
-            <a:srgbClr val="002FA7"/>
+            <a:srgbClr val="FAFAF8"/>
           </a:solidFill>
           <a:ln>
             <a:noFill/>
@@ -4641,14 +4817,788 @@
       </p:sp>
       <p:sp>
         <p:nvSpPr>
-          <p:cNvPr id="3" name="Rectangle 2"/>
+          <p:cNvPr id="4" name="TextBox 3"/>
+          <p:cNvSpPr txBox="1"/>
+          <p:nvPr/>
+        </p:nvSpPr>
+        <p:spPr>
+          <a:xfrm>
+            <a:off x="502920" y="329184"/>
+            <a:ext cx="4572000" cy="274320"/>
+          </a:xfrm>
+          <a:prstGeom prst="rect">
+            <a:avLst/>
+          </a:prstGeom>
+          <a:noFill/>
+        </p:spPr>
+        <p:txBody>
+          <a:bodyPr wrap="square" lIns="0" tIns="0" rIns="0" bIns="0" anchor="t">
+            <a:spAutoFit/>
+          </a:bodyPr>
+          <a:lstStyle/>
+          <a:p>
+            <a:pPr algn="l"/>
+            <a:r>
+              <a:rPr sz="950" b="0" i="0" spc="120">
+                <a:solidFill>
+                  <a:srgbClr val="FFFFFF"/>
+                </a:solidFill>
+                <a:latin typeface="Arial" panose="020B0604020202090204"/>
+                <a:ea typeface="微软雅黑"/>
+              </a:rPr>
+              <a:t>Vision · 愿景</a:t>
+            </a:r>
+            <a:endParaRPr sz="950" b="0" i="0" spc="120">
+              <a:solidFill>
+                <a:srgbClr val="FFFFFF"/>
+              </a:solidFill>
+              <a:latin typeface="Arial" panose="020B0604020202090204"/>
+              <a:ea typeface="微软雅黑"/>
+            </a:endParaRPr>
+          </a:p>
+        </p:txBody>
+      </p:sp>
+      <p:sp>
+        <p:nvSpPr>
+          <p:cNvPr id="5" name="TextBox 4"/>
+          <p:cNvSpPr txBox="1"/>
+          <p:nvPr/>
+        </p:nvSpPr>
+        <p:spPr>
+          <a:xfrm>
+            <a:off x="502920" y="1371600"/>
+            <a:ext cx="8229600" cy="274320"/>
+          </a:xfrm>
+          <a:prstGeom prst="rect">
+            <a:avLst/>
+          </a:prstGeom>
+          <a:noFill/>
+        </p:spPr>
+        <p:txBody>
+          <a:bodyPr wrap="square" lIns="0" tIns="0" rIns="0" bIns="0" anchor="t">
+            <a:spAutoFit/>
+          </a:bodyPr>
+          <a:lstStyle/>
+          <a:p>
+            <a:pPr algn="l"/>
+            <a:r>
+              <a:rPr sz="1050" b="1" i="0" spc="150">
+                <a:solidFill>
+                  <a:srgbClr val="FFFFFF"/>
+                </a:solidFill>
+                <a:latin typeface="Arial" panose="020B0604020202090204"/>
+                <a:ea typeface="微软雅黑"/>
+              </a:rPr>
+              <a:t>TEN-YEAR VISION</a:t>
+            </a:r>
+            <a:endParaRPr sz="1050" b="1" i="0" spc="150">
+              <a:solidFill>
+                <a:srgbClr val="FFFFFF"/>
+              </a:solidFill>
+              <a:latin typeface="Arial" panose="020B0604020202090204"/>
+              <a:ea typeface="微软雅黑"/>
+            </a:endParaRPr>
+          </a:p>
+        </p:txBody>
+      </p:sp>
+      <p:sp>
+        <p:nvSpPr>
+          <p:cNvPr id="6" name="TextBox 5"/>
+          <p:cNvSpPr txBox="1"/>
+          <p:nvPr/>
+        </p:nvSpPr>
+        <p:spPr>
+          <a:xfrm>
+            <a:off x="502920" y="1783080"/>
+            <a:ext cx="4937760" cy="2011680"/>
+          </a:xfrm>
+          <a:prstGeom prst="rect">
+            <a:avLst/>
+          </a:prstGeom>
+          <a:noFill/>
+        </p:spPr>
+        <p:txBody>
+          <a:bodyPr wrap="square" lIns="0" tIns="0" rIns="0" bIns="0" anchor="t">
+            <a:spAutoFit/>
+          </a:bodyPr>
+          <a:lstStyle/>
+          <a:p>
+            <a:pPr>
+              <a:lnSpc>
+                <a:spcPct val="110000"/>
+              </a:lnSpc>
+            </a:pPr>
+            <a:r>
+              <a:rPr sz="2700" b="0" i="0">
+                <a:solidFill>
+                  <a:srgbClr val="FFFFFF"/>
+                </a:solidFill>
+                <a:latin typeface="Arial" panose="020B0604020202090204"/>
+                <a:ea typeface="微软雅黑"/>
+              </a:rPr>
+              <a:t>从跌倒监测切入，</a:t>
+            </a:r>
+            <a:endParaRPr sz="2700" b="0" i="0">
+              <a:solidFill>
+                <a:srgbClr val="FFFFFF"/>
+              </a:solidFill>
+              <a:latin typeface="Arial" panose="020B0604020202090204"/>
+              <a:ea typeface="微软雅黑"/>
+            </a:endParaRPr>
+          </a:p>
+          <a:p>
+            <a:pPr>
+              <a:lnSpc>
+                <a:spcPct val="110000"/>
+              </a:lnSpc>
+            </a:pPr>
+            <a:r>
+              <a:rPr sz="2700" b="0" i="0">
+                <a:solidFill>
+                  <a:srgbClr val="FFFFFF"/>
+                </a:solidFill>
+                <a:latin typeface="Arial" panose="020B0604020202090204"/>
+                <a:ea typeface="微软雅黑"/>
+              </a:rPr>
+              <a:t>做居家养老的</a:t>
+            </a:r>
+            <a:endParaRPr sz="2700" b="0" i="0">
+              <a:solidFill>
+                <a:srgbClr val="FFFFFF"/>
+              </a:solidFill>
+              <a:latin typeface="Arial" panose="020B0604020202090204"/>
+              <a:ea typeface="微软雅黑"/>
+            </a:endParaRPr>
+          </a:p>
+          <a:p>
+            <a:pPr>
+              <a:lnSpc>
+                <a:spcPct val="110000"/>
+              </a:lnSpc>
+            </a:pPr>
+            <a:r>
+              <a:rPr sz="2700" b="0" i="1">
+                <a:solidFill>
+                  <a:srgbClr val="FFFFFF"/>
+                </a:solidFill>
+                <a:latin typeface="Arial" panose="020B0604020202090204"/>
+                <a:ea typeface="微软雅黑"/>
+              </a:rPr>
+              <a:t>健康基础设施</a:t>
+            </a:r>
+            <a:endParaRPr sz="2700" b="0" i="1">
+              <a:solidFill>
+                <a:srgbClr val="FFFFFF"/>
+              </a:solidFill>
+              <a:latin typeface="Arial" panose="020B0604020202090204"/>
+              <a:ea typeface="微软雅黑"/>
+            </a:endParaRPr>
+          </a:p>
+        </p:txBody>
+      </p:sp>
+      <p:sp>
+        <p:nvSpPr>
+          <p:cNvPr id="7" name="TextBox 6"/>
+          <p:cNvSpPr txBox="1"/>
+          <p:nvPr/>
+        </p:nvSpPr>
+        <p:spPr>
+          <a:xfrm>
+            <a:off x="502920" y="4023360"/>
+            <a:ext cx="4937760" cy="1371600"/>
+          </a:xfrm>
+          <a:prstGeom prst="rect">
+            <a:avLst/>
+          </a:prstGeom>
+          <a:noFill/>
+        </p:spPr>
+        <p:txBody>
+          <a:bodyPr wrap="square" lIns="0" tIns="0" rIns="0" bIns="0" anchor="t">
+            <a:spAutoFit/>
+          </a:bodyPr>
+          <a:lstStyle/>
+          <a:p>
+            <a:pPr algn="l">
+              <a:lnSpc>
+                <a:spcPct val="140000"/>
+              </a:lnSpc>
+            </a:pPr>
+            <a:r>
+              <a:rPr sz="1000" b="0" i="0">
+                <a:solidFill>
+                  <a:srgbClr val="DDE4F5"/>
+                </a:solidFill>
+                <a:latin typeface="Arial" panose="020B0604020202090204"/>
+                <a:ea typeface="微软雅黑"/>
+              </a:rPr>
+              <a:t>中国正进入深度老龄化，未来二十年数以亿计的老人在家养老，他们的健康对子女、对医疗养老体系长期是盲区。家安用持续、连续的居家健康数据把盲区补上。</a:t>
+            </a:r>
+            <a:endParaRPr sz="1000" b="0" i="0">
+              <a:solidFill>
+                <a:srgbClr val="DDE4F5"/>
+              </a:solidFill>
+              <a:latin typeface="Arial" panose="020B0604020202090204"/>
+              <a:ea typeface="微软雅黑"/>
+            </a:endParaRPr>
+          </a:p>
+        </p:txBody>
+      </p:sp>
+      <p:sp>
+        <p:nvSpPr>
+          <p:cNvPr id="8" name="TextBox 7"/>
+          <p:cNvSpPr txBox="1"/>
+          <p:nvPr/>
+        </p:nvSpPr>
+        <p:spPr>
+          <a:xfrm>
+            <a:off x="502920" y="5943600"/>
+            <a:ext cx="4937760" cy="457200"/>
+          </a:xfrm>
+          <a:prstGeom prst="rect">
+            <a:avLst/>
+          </a:prstGeom>
+          <a:noFill/>
+        </p:spPr>
+        <p:txBody>
+          <a:bodyPr wrap="square" lIns="0" tIns="0" rIns="0" bIns="0" anchor="t">
+            <a:spAutoFit/>
+          </a:bodyPr>
+          <a:lstStyle/>
+          <a:p>
+            <a:pPr algn="l"/>
+            <a:r>
+              <a:rPr sz="1100" b="0" i="0">
+                <a:solidFill>
+                  <a:srgbClr val="FFFFFF"/>
+                </a:solidFill>
+                <a:latin typeface="Arial" panose="020B0604020202090204"/>
+                <a:ea typeface="微软雅黑"/>
+              </a:rPr>
+              <a:t>让每个在家变老的人，被持续看见、被及时守护。</a:t>
+            </a:r>
+            <a:endParaRPr sz="1100" b="0" i="0">
+              <a:solidFill>
+                <a:srgbClr val="FFFFFF"/>
+              </a:solidFill>
+              <a:latin typeface="Arial" panose="020B0604020202090204"/>
+              <a:ea typeface="微软雅黑"/>
+            </a:endParaRPr>
+          </a:p>
+        </p:txBody>
+      </p:sp>
+      <p:sp>
+        <p:nvSpPr>
+          <p:cNvPr id="9" name="TextBox 8"/>
+          <p:cNvSpPr txBox="1"/>
+          <p:nvPr/>
+        </p:nvSpPr>
+        <p:spPr>
+          <a:xfrm>
+            <a:off x="6766560" y="329184"/>
+            <a:ext cx="4572000" cy="274320"/>
+          </a:xfrm>
+          <a:prstGeom prst="rect">
+            <a:avLst/>
+          </a:prstGeom>
+          <a:noFill/>
+        </p:spPr>
+        <p:txBody>
+          <a:bodyPr wrap="square" lIns="0" tIns="0" rIns="0" bIns="0" anchor="t">
+            <a:spAutoFit/>
+          </a:bodyPr>
+          <a:lstStyle/>
+          <a:p>
+            <a:pPr algn="l"/>
+            <a:r>
+              <a:rPr sz="950" b="0" i="0" spc="120">
+                <a:solidFill>
+                  <a:srgbClr val="737373"/>
+                </a:solidFill>
+                <a:latin typeface="Arial" panose="020B0604020202090204"/>
+                <a:ea typeface="微软雅黑"/>
+              </a:rPr>
+              <a:t>TAKEAWAYS</a:t>
+            </a:r>
+            <a:endParaRPr sz="950" b="0" i="0" spc="120">
+              <a:solidFill>
+                <a:srgbClr val="737373"/>
+              </a:solidFill>
+              <a:latin typeface="Arial" panose="020B0604020202090204"/>
+              <a:ea typeface="微软雅黑"/>
+            </a:endParaRPr>
+          </a:p>
+        </p:txBody>
+      </p:sp>
+      <p:sp>
+        <p:nvSpPr>
+          <p:cNvPr id="10" name="TextBox 9"/>
+          <p:cNvSpPr txBox="1"/>
+          <p:nvPr/>
+        </p:nvSpPr>
+        <p:spPr>
+          <a:xfrm>
+            <a:off x="6766560" y="1463040"/>
+            <a:ext cx="4572000" cy="274320"/>
+          </a:xfrm>
+          <a:prstGeom prst="rect">
+            <a:avLst/>
+          </a:prstGeom>
+          <a:noFill/>
+        </p:spPr>
+        <p:txBody>
+          <a:bodyPr wrap="square" lIns="0" tIns="0" rIns="0" bIns="0" anchor="t">
+            <a:spAutoFit/>
+          </a:bodyPr>
+          <a:lstStyle/>
+          <a:p>
+            <a:pPr algn="l"/>
+            <a:r>
+              <a:rPr sz="1000" b="1" i="0" spc="100">
+                <a:solidFill>
+                  <a:srgbClr val="002FA7"/>
+                </a:solidFill>
+                <a:latin typeface="Arial" panose="020B0604020202090204"/>
+                <a:ea typeface="微软雅黑"/>
+              </a:rPr>
+              <a:t>01</a:t>
+            </a:r>
+            <a:endParaRPr sz="1000" b="1" i="0" spc="100">
+              <a:solidFill>
+                <a:srgbClr val="002FA7"/>
+              </a:solidFill>
+              <a:latin typeface="Arial" panose="020B0604020202090204"/>
+              <a:ea typeface="微软雅黑"/>
+            </a:endParaRPr>
+          </a:p>
+        </p:txBody>
+      </p:sp>
+      <p:sp>
+        <p:nvSpPr>
+          <p:cNvPr id="11" name="TextBox 10"/>
+          <p:cNvSpPr txBox="1"/>
+          <p:nvPr/>
+        </p:nvSpPr>
+        <p:spPr>
+          <a:xfrm>
+            <a:off x="6766560" y="1755648"/>
+            <a:ext cx="4572000" cy="365760"/>
+          </a:xfrm>
+          <a:prstGeom prst="rect">
+            <a:avLst/>
+          </a:prstGeom>
+          <a:noFill/>
+        </p:spPr>
+        <p:txBody>
+          <a:bodyPr wrap="square" lIns="0" tIns="0" rIns="0" bIns="0" anchor="t">
+            <a:spAutoFit/>
+          </a:bodyPr>
+          <a:lstStyle/>
+          <a:p>
+            <a:pPr algn="l"/>
+            <a:r>
+              <a:rPr sz="1500" b="0" i="0">
+                <a:solidFill>
+                  <a:srgbClr val="0A0A0A"/>
+                </a:solidFill>
+                <a:latin typeface="Arial" panose="020B0604020202090204"/>
+                <a:ea typeface="微软雅黑"/>
+              </a:rPr>
+              <a:t>切入点足够痛</a:t>
+            </a:r>
+            <a:endParaRPr sz="1500" b="0" i="0">
+              <a:solidFill>
+                <a:srgbClr val="0A0A0A"/>
+              </a:solidFill>
+              <a:latin typeface="Arial" panose="020B0604020202090204"/>
+              <a:ea typeface="微软雅黑"/>
+            </a:endParaRPr>
+          </a:p>
+        </p:txBody>
+      </p:sp>
+      <p:sp>
+        <p:nvSpPr>
+          <p:cNvPr id="12" name="TextBox 11"/>
+          <p:cNvSpPr txBox="1"/>
+          <p:nvPr/>
+        </p:nvSpPr>
+        <p:spPr>
+          <a:xfrm>
+            <a:off x="6766560" y="2176272"/>
+            <a:ext cx="4572000" cy="457200"/>
+          </a:xfrm>
+          <a:prstGeom prst="rect">
+            <a:avLst/>
+          </a:prstGeom>
+          <a:noFill/>
+        </p:spPr>
+        <p:txBody>
+          <a:bodyPr wrap="square" lIns="0" tIns="0" rIns="0" bIns="0" anchor="t">
+            <a:spAutoFit/>
+          </a:bodyPr>
+          <a:lstStyle/>
+          <a:p>
+            <a:pPr algn="l">
+              <a:lnSpc>
+                <a:spcPct val="130000"/>
+              </a:lnSpc>
+            </a:pPr>
+            <a:r>
+              <a:rPr sz="950" b="0" i="0">
+                <a:solidFill>
+                  <a:srgbClr val="444444"/>
+                </a:solidFill>
+                <a:latin typeface="Arial" panose="020B0604020202090204"/>
+                <a:ea typeface="微软雅黑"/>
+              </a:rPr>
+              <a:t>2.2 亿老人、跌倒首位死因、现有方案全失效。</a:t>
+            </a:r>
+            <a:endParaRPr sz="950" b="0" i="0">
+              <a:solidFill>
+                <a:srgbClr val="444444"/>
+              </a:solidFill>
+              <a:latin typeface="Arial" panose="020B0604020202090204"/>
+              <a:ea typeface="微软雅黑"/>
+            </a:endParaRPr>
+          </a:p>
+        </p:txBody>
+      </p:sp>
+      <p:sp>
+        <p:nvSpPr>
+          <p:cNvPr id="13" name="TextBox 12"/>
+          <p:cNvSpPr txBox="1"/>
+          <p:nvPr/>
+        </p:nvSpPr>
+        <p:spPr>
+          <a:xfrm>
+            <a:off x="6766560" y="2834640"/>
+            <a:ext cx="4572000" cy="274320"/>
+          </a:xfrm>
+          <a:prstGeom prst="rect">
+            <a:avLst/>
+          </a:prstGeom>
+          <a:noFill/>
+        </p:spPr>
+        <p:txBody>
+          <a:bodyPr wrap="square" lIns="0" tIns="0" rIns="0" bIns="0" anchor="t">
+            <a:spAutoFit/>
+          </a:bodyPr>
+          <a:lstStyle/>
+          <a:p>
+            <a:pPr algn="l"/>
+            <a:r>
+              <a:rPr sz="1000" b="1" i="0" spc="100">
+                <a:solidFill>
+                  <a:srgbClr val="002FA7"/>
+                </a:solidFill>
+                <a:latin typeface="Arial" panose="020B0604020202090204"/>
+                <a:ea typeface="微软雅黑"/>
+              </a:rPr>
+              <a:t>02</a:t>
+            </a:r>
+            <a:endParaRPr sz="1000" b="1" i="0" spc="100">
+              <a:solidFill>
+                <a:srgbClr val="002FA7"/>
+              </a:solidFill>
+              <a:latin typeface="Arial" panose="020B0604020202090204"/>
+              <a:ea typeface="微软雅黑"/>
+            </a:endParaRPr>
+          </a:p>
+        </p:txBody>
+      </p:sp>
+      <p:sp>
+        <p:nvSpPr>
+          <p:cNvPr id="14" name="TextBox 13"/>
+          <p:cNvSpPr txBox="1"/>
+          <p:nvPr/>
+        </p:nvSpPr>
+        <p:spPr>
+          <a:xfrm>
+            <a:off x="6766560" y="3127248"/>
+            <a:ext cx="4572000" cy="365760"/>
+          </a:xfrm>
+          <a:prstGeom prst="rect">
+            <a:avLst/>
+          </a:prstGeom>
+          <a:noFill/>
+        </p:spPr>
+        <p:txBody>
+          <a:bodyPr wrap="square" lIns="0" tIns="0" rIns="0" bIns="0" anchor="t">
+            <a:spAutoFit/>
+          </a:bodyPr>
+          <a:lstStyle/>
+          <a:p>
+            <a:pPr algn="l"/>
+            <a:r>
+              <a:rPr sz="1500" b="0" i="0">
+                <a:solidFill>
+                  <a:srgbClr val="0A0A0A"/>
+                </a:solidFill>
+                <a:latin typeface="Arial" panose="020B0604020202090204"/>
+                <a:ea typeface="微软雅黑"/>
+              </a:rPr>
+              <a:t>壁垒足够深</a:t>
+            </a:r>
+            <a:endParaRPr sz="1500" b="0" i="0">
+              <a:solidFill>
+                <a:srgbClr val="0A0A0A"/>
+              </a:solidFill>
+              <a:latin typeface="Arial" panose="020B0604020202090204"/>
+              <a:ea typeface="微软雅黑"/>
+            </a:endParaRPr>
+          </a:p>
+        </p:txBody>
+      </p:sp>
+      <p:sp>
+        <p:nvSpPr>
+          <p:cNvPr id="15" name="TextBox 14"/>
+          <p:cNvSpPr txBox="1"/>
+          <p:nvPr/>
+        </p:nvSpPr>
+        <p:spPr>
+          <a:xfrm>
+            <a:off x="6766560" y="3547872"/>
+            <a:ext cx="4572000" cy="457200"/>
+          </a:xfrm>
+          <a:prstGeom prst="rect">
+            <a:avLst/>
+          </a:prstGeom>
+          <a:noFill/>
+        </p:spPr>
+        <p:txBody>
+          <a:bodyPr wrap="square" lIns="0" tIns="0" rIns="0" bIns="0" anchor="t">
+            <a:spAutoFit/>
+          </a:bodyPr>
+          <a:lstStyle/>
+          <a:p>
+            <a:pPr algn="l">
+              <a:lnSpc>
+                <a:spcPct val="130000"/>
+              </a:lnSpc>
+            </a:pPr>
+            <a:r>
+              <a:rPr sz="950" b="0" i="0">
+                <a:solidFill>
+                  <a:srgbClr val="444444"/>
+                </a:solidFill>
+                <a:latin typeface="Arial" panose="020B0604020202090204"/>
+                <a:ea typeface="微软雅黑"/>
+              </a:rPr>
+              <a:t>自研点云 + 数据飞轮，越用越准、短期难复制。</a:t>
+            </a:r>
+            <a:endParaRPr sz="950" b="0" i="0">
+              <a:solidFill>
+                <a:srgbClr val="444444"/>
+              </a:solidFill>
+              <a:latin typeface="Arial" panose="020B0604020202090204"/>
+              <a:ea typeface="微软雅黑"/>
+            </a:endParaRPr>
+          </a:p>
+        </p:txBody>
+      </p:sp>
+      <p:sp>
+        <p:nvSpPr>
+          <p:cNvPr id="16" name="TextBox 15"/>
+          <p:cNvSpPr txBox="1"/>
+          <p:nvPr/>
+        </p:nvSpPr>
+        <p:spPr>
+          <a:xfrm>
+            <a:off x="6766560" y="4206240"/>
+            <a:ext cx="4572000" cy="274320"/>
+          </a:xfrm>
+          <a:prstGeom prst="rect">
+            <a:avLst/>
+          </a:prstGeom>
+          <a:noFill/>
+        </p:spPr>
+        <p:txBody>
+          <a:bodyPr wrap="square" lIns="0" tIns="0" rIns="0" bIns="0" anchor="t">
+            <a:spAutoFit/>
+          </a:bodyPr>
+          <a:lstStyle/>
+          <a:p>
+            <a:pPr algn="l"/>
+            <a:r>
+              <a:rPr sz="1000" b="1" i="0" spc="100">
+                <a:solidFill>
+                  <a:srgbClr val="002FA7"/>
+                </a:solidFill>
+                <a:latin typeface="Arial" panose="020B0604020202090204"/>
+                <a:ea typeface="微软雅黑"/>
+              </a:rPr>
+              <a:t>03</a:t>
+            </a:r>
+            <a:endParaRPr sz="1000" b="1" i="0" spc="100">
+              <a:solidFill>
+                <a:srgbClr val="002FA7"/>
+              </a:solidFill>
+              <a:latin typeface="Arial" panose="020B0604020202090204"/>
+              <a:ea typeface="微软雅黑"/>
+            </a:endParaRPr>
+          </a:p>
+        </p:txBody>
+      </p:sp>
+      <p:sp>
+        <p:nvSpPr>
+          <p:cNvPr id="17" name="TextBox 16"/>
+          <p:cNvSpPr txBox="1"/>
+          <p:nvPr/>
+        </p:nvSpPr>
+        <p:spPr>
+          <a:xfrm>
+            <a:off x="6766560" y="4498848"/>
+            <a:ext cx="4572000" cy="365760"/>
+          </a:xfrm>
+          <a:prstGeom prst="rect">
+            <a:avLst/>
+          </a:prstGeom>
+          <a:noFill/>
+        </p:spPr>
+        <p:txBody>
+          <a:bodyPr wrap="square" lIns="0" tIns="0" rIns="0" bIns="0" anchor="t">
+            <a:spAutoFit/>
+          </a:bodyPr>
+          <a:lstStyle/>
+          <a:p>
+            <a:pPr algn="l"/>
+            <a:r>
+              <a:rPr sz="1500" b="0" i="0">
+                <a:solidFill>
+                  <a:srgbClr val="0A0A0A"/>
+                </a:solidFill>
+                <a:latin typeface="Arial" panose="020B0604020202090204"/>
+                <a:ea typeface="微软雅黑"/>
+              </a:rPr>
+              <a:t>路径足够清</a:t>
+            </a:r>
+            <a:endParaRPr sz="1500" b="0" i="0">
+              <a:solidFill>
+                <a:srgbClr val="0A0A0A"/>
+              </a:solidFill>
+              <a:latin typeface="Arial" panose="020B0604020202090204"/>
+              <a:ea typeface="微软雅黑"/>
+            </a:endParaRPr>
+          </a:p>
+        </p:txBody>
+      </p:sp>
+      <p:sp>
+        <p:nvSpPr>
+          <p:cNvPr id="18" name="TextBox 17"/>
+          <p:cNvSpPr txBox="1"/>
+          <p:nvPr/>
+        </p:nvSpPr>
+        <p:spPr>
+          <a:xfrm>
+            <a:off x="6766560" y="4919472"/>
+            <a:ext cx="4572000" cy="457200"/>
+          </a:xfrm>
+          <a:prstGeom prst="rect">
+            <a:avLst/>
+          </a:prstGeom>
+          <a:noFill/>
+        </p:spPr>
+        <p:txBody>
+          <a:bodyPr wrap="square" lIns="0" tIns="0" rIns="0" bIns="0" anchor="t">
+            <a:spAutoFit/>
+          </a:bodyPr>
+          <a:lstStyle/>
+          <a:p>
+            <a:pPr algn="l">
+              <a:lnSpc>
+                <a:spcPct val="130000"/>
+              </a:lnSpc>
+            </a:pPr>
+            <a:r>
+              <a:rPr sz="950" b="0" i="0">
+                <a:solidFill>
+                  <a:srgbClr val="444444"/>
+                </a:solidFill>
+                <a:latin typeface="Arial" panose="020B0604020202090204"/>
+                <a:ea typeface="微软雅黑"/>
+              </a:rPr>
+              <a:t>买断获客 → 降本转正 → 数据变现，自洽可信。</a:t>
+            </a:r>
+            <a:endParaRPr sz="950" b="0" i="0">
+              <a:solidFill>
+                <a:srgbClr val="444444"/>
+              </a:solidFill>
+              <a:latin typeface="Arial" panose="020B0604020202090204"/>
+              <a:ea typeface="微软雅黑"/>
+            </a:endParaRPr>
+          </a:p>
+        </p:txBody>
+      </p:sp>
+      <p:sp>
+        <p:nvSpPr>
+          <p:cNvPr id="19" name="TextBox 18"/>
+          <p:cNvSpPr txBox="1"/>
+          <p:nvPr/>
+        </p:nvSpPr>
+        <p:spPr>
+          <a:xfrm>
+            <a:off x="6766560" y="6309360"/>
+            <a:ext cx="4846320" cy="274320"/>
+          </a:xfrm>
+          <a:prstGeom prst="rect">
+            <a:avLst/>
+          </a:prstGeom>
+          <a:noFill/>
+        </p:spPr>
+        <p:txBody>
+          <a:bodyPr wrap="square" lIns="0" tIns="0" rIns="0" bIns="0" anchor="t">
+            <a:spAutoFit/>
+          </a:bodyPr>
+          <a:lstStyle/>
+          <a:p>
+            <a:pPr algn="r"/>
+            <a:r>
+              <a:rPr sz="900" b="0" i="0" spc="100">
+                <a:solidFill>
+                  <a:srgbClr val="737373"/>
+                </a:solidFill>
+                <a:latin typeface="Arial" panose="020B0604020202090204"/>
+                <a:ea typeface="微软雅黑"/>
+              </a:rPr>
+              <a:t>家安 housafe · 天使轮 800 万</a:t>
+            </a:r>
+            <a:endParaRPr sz="900" b="0" i="0" spc="100">
+              <a:solidFill>
+                <a:srgbClr val="737373"/>
+              </a:solidFill>
+              <a:latin typeface="Arial" panose="020B0604020202090204"/>
+              <a:ea typeface="微软雅黑"/>
+            </a:endParaRPr>
+          </a:p>
+        </p:txBody>
+      </p:sp>
+    </p:spTree>
+  </p:cSld>
+  <p:clrMapOvr>
+    <a:masterClrMapping/>
+  </p:clrMapOvr>
+</p:sld>
+</file>
+
+<file path=ppt/slides/slide5.xml><?xml version="1.0" encoding="utf-8"?>
+<p:sld xmlns:a="http://schemas.openxmlformats.org/drawingml/2006/main" xmlns:r="http://schemas.openxmlformats.org/officeDocument/2006/relationships" xmlns:p="http://schemas.openxmlformats.org/presentationml/2006/main">
+  <p:cSld>
+    <p:spTree>
+      <p:nvGrpSpPr>
+        <p:cNvPr id="1" name=""/>
+        <p:cNvGrpSpPr/>
+        <p:nvPr/>
+      </p:nvGrpSpPr>
+      <p:grpSpPr/>
+      <p:sp>
+        <p:nvSpPr>
+          <p:cNvPr id="2" name="Rectangle 1"/>
           <p:cNvSpPr/>
           <p:nvPr/>
         </p:nvSpPr>
         <p:spPr>
           <a:xfrm>
-            <a:off x="6096304" y="0"/>
-            <a:ext cx="6095390" cy="6858000"/>
+            <a:off x="0" y="0"/>
+            <a:ext cx="12191695" cy="6858000"/>
           </a:xfrm>
           <a:prstGeom prst="rect">
             <a:avLst/>
@@ -4685,14 +5635,57 @@
       </p:sp>
       <p:sp>
         <p:nvSpPr>
+          <p:cNvPr id="3" name="TextBox 2"/>
+          <p:cNvSpPr txBox="1"/>
+          <p:nvPr/>
+        </p:nvSpPr>
+        <p:spPr>
+          <a:xfrm>
+            <a:off x="502920" y="329184"/>
+            <a:ext cx="7315200" cy="274320"/>
+          </a:xfrm>
+          <a:prstGeom prst="rect">
+            <a:avLst/>
+          </a:prstGeom>
+          <a:noFill/>
+        </p:spPr>
+        <p:txBody>
+          <a:bodyPr wrap="square" lIns="0" tIns="0" rIns="0" bIns="0" anchor="t">
+            <a:spAutoFit/>
+          </a:bodyPr>
+          <a:lstStyle/>
+          <a:p>
+            <a:pPr algn="l"/>
+            <a:r>
+              <a:rPr sz="950" b="0" i="0" spc="120">
+                <a:solidFill>
+                  <a:srgbClr val="737373"/>
+                </a:solidFill>
+                <a:latin typeface="Arial" panose="020B0604020202090204"/>
+                <a:ea typeface="微软雅黑"/>
+              </a:rPr>
+              <a:t>样式规范 · STYLE GUIDE</a:t>
+            </a:r>
+            <a:endParaRPr sz="950" b="0" i="0" spc="120">
+              <a:solidFill>
+                <a:srgbClr val="737373"/>
+              </a:solidFill>
+              <a:latin typeface="Arial" panose="020B0604020202090204"/>
+              <a:ea typeface="微软雅黑"/>
+            </a:endParaRPr>
+          </a:p>
+        </p:txBody>
+      </p:sp>
+      <p:sp>
+        <p:nvSpPr>
           <p:cNvPr id="4" name="TextBox 3"/>
           <p:cNvSpPr txBox="1"/>
           <p:nvPr/>
         </p:nvSpPr>
         <p:spPr>
           <a:xfrm>
-            <a:off x="502920" y="329184"/>
-            <a:ext cx="4572000" cy="274320"/>
+            <a:off x="5790895" y="329184"/>
+            <a:ext cx="5897880" cy="274320"/>
           </a:xfrm>
           <a:prstGeom prst="rect">
             <a:avLst/>
@@ -4700,22 +5693,29 @@
           <a:noFill/>
         </p:spPr>
         <p:txBody>
-          <a:bodyPr wrap="square" anchor="t" lIns="0" rIns="0" tIns="0" bIns="0">
+          <a:bodyPr wrap="square" lIns="0" tIns="0" rIns="0" bIns="0" anchor="t">
             <a:spAutoFit/>
           </a:bodyPr>
           <a:lstStyle/>
           <a:p>
-            <a:pPr algn="l"/>
+            <a:pPr algn="r"/>
             <a:r>
               <a:rPr sz="950" b="0" i="0" spc="120">
                 <a:solidFill>
-                  <a:srgbClr val="FFFFFF"/>
-                </a:solidFill>
-                <a:latin typeface="Arial"/>
+                  <a:srgbClr val="737373"/>
+                </a:solidFill>
+                <a:latin typeface="Arial" panose="020B0604020202090204"/>
                 <a:ea typeface="微软雅黑"/>
               </a:rPr>
-              <a:t>Vision · 愿景</a:t>
-            </a:r>
+              <a:t>MASTER / SPEC</a:t>
+            </a:r>
+            <a:endParaRPr sz="950" b="0" i="0" spc="120">
+              <a:solidFill>
+                <a:srgbClr val="737373"/>
+              </a:solidFill>
+              <a:latin typeface="Arial" panose="020B0604020202090204"/>
+              <a:ea typeface="微软雅黑"/>
+            </a:endParaRPr>
           </a:p>
         </p:txBody>
       </p:sp>
@@ -4727,8 +5727,8 @@
         </p:nvSpPr>
         <p:spPr>
           <a:xfrm>
-            <a:off x="502920" y="1371600"/>
-            <a:ext cx="8229600" cy="274320"/>
+            <a:off x="502920" y="822960"/>
+            <a:ext cx="11155680" cy="1143000"/>
           </a:xfrm>
           <a:prstGeom prst="rect">
             <a:avLst/>
@@ -4736,620 +5736,57 @@
           <a:noFill/>
         </p:spPr>
         <p:txBody>
-          <a:bodyPr wrap="square" anchor="t" lIns="0" rIns="0" tIns="0" bIns="0">
+          <a:bodyPr wrap="square" lIns="0" tIns="0" rIns="0" bIns="0" anchor="t">
             <a:spAutoFit/>
           </a:bodyPr>
           <a:lstStyle/>
           <a:p>
-            <a:pPr algn="l"/>
-            <a:r>
-              <a:rPr sz="1050" b="1" i="0" spc="150">
-                <a:solidFill>
-                  <a:srgbClr val="FFFFFF"/>
-                </a:solidFill>
-                <a:latin typeface="Arial"/>
+            <a:pPr>
+              <a:lnSpc>
+                <a:spcPct val="105000"/>
+              </a:lnSpc>
+            </a:pPr>
+            <a:r>
+              <a:rPr sz="2600" b="0" i="0">
+                <a:solidFill>
+                  <a:srgbClr val="0A0A0A"/>
+                </a:solidFill>
+                <a:latin typeface="Arial" panose="020B0604020202090204"/>
                 <a:ea typeface="微软雅黑"/>
               </a:rPr>
-              <a:t>TEN-YEAR VISION</a:t>
-            </a:r>
-          </a:p>
-        </p:txBody>
-      </p:sp>
-      <p:sp>
-        <p:nvSpPr>
-          <p:cNvPr id="6" name="TextBox 5"/>
-          <p:cNvSpPr txBox="1"/>
-          <p:nvPr/>
-        </p:nvSpPr>
-        <p:spPr>
-          <a:xfrm>
-            <a:off x="502920" y="1783080"/>
-            <a:ext cx="4937760" cy="2011680"/>
-          </a:xfrm>
-          <a:prstGeom prst="rect">
-            <a:avLst/>
-          </a:prstGeom>
-          <a:noFill/>
-        </p:spPr>
-        <p:txBody>
-          <a:bodyPr wrap="square" anchor="t" lIns="0" rIns="0" tIns="0" bIns="0">
-            <a:spAutoFit/>
-          </a:bodyPr>
-          <a:lstStyle/>
-          <a:p>
-            <a:pPr>
-              <a:lnSpc>
-                <a:spcPct val="110000"/>
-              </a:lnSpc>
-            </a:pPr>
-            <a:r>
-              <a:rPr sz="2700" b="0" i="0">
-                <a:solidFill>
-                  <a:srgbClr val="FFFFFF"/>
-                </a:solidFill>
-                <a:latin typeface="Arial"/>
-                <a:ea typeface="微软雅黑"/>
-              </a:rPr>
-              <a:t>从跌倒监测切入，</a:t>
-            </a:r>
-          </a:p>
-          <a:p>
-            <a:pPr>
-              <a:lnSpc>
-                <a:spcPct val="110000"/>
-              </a:lnSpc>
-            </a:pPr>
-            <a:r>
-              <a:rPr sz="2700" b="0" i="0">
-                <a:solidFill>
-                  <a:srgbClr val="FFFFFF"/>
-                </a:solidFill>
-                <a:latin typeface="Arial"/>
-                <a:ea typeface="微软雅黑"/>
-              </a:rPr>
-              <a:t>做居家养老的</a:t>
-            </a:r>
-          </a:p>
-          <a:p>
-            <a:pPr>
-              <a:lnSpc>
-                <a:spcPct val="110000"/>
-              </a:lnSpc>
-            </a:pPr>
-            <a:r>
-              <a:rPr sz="2700" b="0" i="1">
-                <a:solidFill>
-                  <a:srgbClr val="FFFFFF"/>
-                </a:solidFill>
-                <a:latin typeface="Arial"/>
-                <a:ea typeface="微软雅黑"/>
-              </a:rPr>
-              <a:t>健康基础设施</a:t>
-            </a:r>
-          </a:p>
-        </p:txBody>
-      </p:sp>
-      <p:sp>
-        <p:nvSpPr>
-          <p:cNvPr id="7" name="TextBox 6"/>
-          <p:cNvSpPr txBox="1"/>
-          <p:nvPr/>
-        </p:nvSpPr>
-        <p:spPr>
-          <a:xfrm>
-            <a:off x="502920" y="4023360"/>
-            <a:ext cx="4937760" cy="1371600"/>
-          </a:xfrm>
-          <a:prstGeom prst="rect">
-            <a:avLst/>
-          </a:prstGeom>
-          <a:noFill/>
-        </p:spPr>
-        <p:txBody>
-          <a:bodyPr wrap="square" anchor="t" lIns="0" rIns="0" tIns="0" bIns="0">
-            <a:spAutoFit/>
-          </a:bodyPr>
-          <a:lstStyle/>
-          <a:p>
-            <a:pPr algn="l">
-              <a:lnSpc>
-                <a:spcPct val="140000"/>
-              </a:lnSpc>
-            </a:pPr>
-            <a:r>
-              <a:rPr sz="1000" b="0" i="0">
-                <a:solidFill>
-                  <a:srgbClr val="DDE4F5"/>
-                </a:solidFill>
-                <a:latin typeface="Arial"/>
-                <a:ea typeface="微软雅黑"/>
-              </a:rPr>
-              <a:t>中国正进入深度老龄化，未来二十年数以亿计的老人在家养老，他们的健康对子女、对医疗养老体系长期是盲区。家安用持续、连续的居家健康数据把盲区补上。</a:t>
-            </a:r>
-          </a:p>
-        </p:txBody>
-      </p:sp>
-      <p:sp>
-        <p:nvSpPr>
-          <p:cNvPr id="8" name="TextBox 7"/>
-          <p:cNvSpPr txBox="1"/>
-          <p:nvPr/>
-        </p:nvSpPr>
-        <p:spPr>
-          <a:xfrm>
-            <a:off x="502920" y="5943600"/>
-            <a:ext cx="4937760" cy="457200"/>
-          </a:xfrm>
-          <a:prstGeom prst="rect">
-            <a:avLst/>
-          </a:prstGeom>
-          <a:noFill/>
-        </p:spPr>
-        <p:txBody>
-          <a:bodyPr wrap="square" anchor="t" lIns="0" rIns="0" tIns="0" bIns="0">
-            <a:spAutoFit/>
-          </a:bodyPr>
-          <a:lstStyle/>
-          <a:p>
-            <a:pPr algn="l"/>
-            <a:r>
-              <a:rPr sz="1100" b="0" i="0">
-                <a:solidFill>
-                  <a:srgbClr val="FFFFFF"/>
-                </a:solidFill>
-                <a:latin typeface="Arial"/>
-                <a:ea typeface="微软雅黑"/>
-              </a:rPr>
-              <a:t>让每个在家变老的人，被持续看见、被及时守护。</a:t>
-            </a:r>
-          </a:p>
-        </p:txBody>
-      </p:sp>
-      <p:sp>
-        <p:nvSpPr>
-          <p:cNvPr id="9" name="TextBox 8"/>
-          <p:cNvSpPr txBox="1"/>
-          <p:nvPr/>
-        </p:nvSpPr>
-        <p:spPr>
-          <a:xfrm>
-            <a:off x="6766560" y="329184"/>
-            <a:ext cx="4572000" cy="274320"/>
-          </a:xfrm>
-          <a:prstGeom prst="rect">
-            <a:avLst/>
-          </a:prstGeom>
-          <a:noFill/>
-        </p:spPr>
-        <p:txBody>
-          <a:bodyPr wrap="square" anchor="t" lIns="0" rIns="0" tIns="0" bIns="0">
-            <a:spAutoFit/>
-          </a:bodyPr>
-          <a:lstStyle/>
-          <a:p>
-            <a:pPr algn="l"/>
-            <a:r>
-              <a:rPr sz="950" b="0" i="0" spc="120">
-                <a:solidFill>
-                  <a:srgbClr val="737373"/>
-                </a:solidFill>
-                <a:latin typeface="Arial"/>
-                <a:ea typeface="微软雅黑"/>
-              </a:rPr>
-              <a:t>TAKEAWAYS</a:t>
-            </a:r>
-          </a:p>
-        </p:txBody>
-      </p:sp>
-      <p:sp>
-        <p:nvSpPr>
-          <p:cNvPr id="10" name="TextBox 9"/>
-          <p:cNvSpPr txBox="1"/>
-          <p:nvPr/>
-        </p:nvSpPr>
-        <p:spPr>
-          <a:xfrm>
-            <a:off x="6766560" y="1463040"/>
-            <a:ext cx="4572000" cy="274320"/>
-          </a:xfrm>
-          <a:prstGeom prst="rect">
-            <a:avLst/>
-          </a:prstGeom>
-          <a:noFill/>
-        </p:spPr>
-        <p:txBody>
-          <a:bodyPr wrap="square" anchor="t" lIns="0" rIns="0" tIns="0" bIns="0">
-            <a:spAutoFit/>
-          </a:bodyPr>
-          <a:lstStyle/>
-          <a:p>
-            <a:pPr algn="l"/>
-            <a:r>
-              <a:rPr sz="1000" b="1" i="0" spc="100">
-                <a:solidFill>
-                  <a:srgbClr val="002FA7"/>
-                </a:solidFill>
-                <a:latin typeface="Arial"/>
-                <a:ea typeface="微软雅黑"/>
-              </a:rPr>
-              <a:t>01</a:t>
-            </a:r>
-          </a:p>
-        </p:txBody>
-      </p:sp>
-      <p:sp>
-        <p:nvSpPr>
-          <p:cNvPr id="11" name="TextBox 10"/>
-          <p:cNvSpPr txBox="1"/>
-          <p:nvPr/>
-        </p:nvSpPr>
-        <p:spPr>
-          <a:xfrm>
-            <a:off x="6766560" y="1755648"/>
-            <a:ext cx="4572000" cy="365760"/>
-          </a:xfrm>
-          <a:prstGeom prst="rect">
-            <a:avLst/>
-          </a:prstGeom>
-          <a:noFill/>
-        </p:spPr>
-        <p:txBody>
-          <a:bodyPr wrap="square" anchor="t" lIns="0" rIns="0" tIns="0" bIns="0">
-            <a:spAutoFit/>
-          </a:bodyPr>
-          <a:lstStyle/>
-          <a:p>
-            <a:pPr algn="l"/>
-            <a:r>
-              <a:rPr sz="1500" b="0" i="0">
-                <a:solidFill>
-                  <a:srgbClr val="0A0A0A"/>
-                </a:solidFill>
-                <a:latin typeface="Arial"/>
-                <a:ea typeface="微软雅黑"/>
-              </a:rPr>
-              <a:t>切入点足够痛</a:t>
-            </a:r>
-          </a:p>
-        </p:txBody>
-      </p:sp>
-      <p:sp>
-        <p:nvSpPr>
-          <p:cNvPr id="12" name="TextBox 11"/>
-          <p:cNvSpPr txBox="1"/>
-          <p:nvPr/>
-        </p:nvSpPr>
-        <p:spPr>
-          <a:xfrm>
-            <a:off x="6766560" y="2176272"/>
-            <a:ext cx="4572000" cy="457200"/>
-          </a:xfrm>
-          <a:prstGeom prst="rect">
-            <a:avLst/>
-          </a:prstGeom>
-          <a:noFill/>
-        </p:spPr>
-        <p:txBody>
-          <a:bodyPr wrap="square" anchor="t" lIns="0" rIns="0" tIns="0" bIns="0">
-            <a:spAutoFit/>
-          </a:bodyPr>
-          <a:lstStyle/>
-          <a:p>
-            <a:pPr algn="l">
-              <a:lnSpc>
-                <a:spcPct val="130000"/>
-              </a:lnSpc>
-            </a:pPr>
-            <a:r>
-              <a:rPr sz="950" b="0" i="0">
-                <a:solidFill>
-                  <a:srgbClr val="444444"/>
-                </a:solidFill>
-                <a:latin typeface="Arial"/>
-                <a:ea typeface="微软雅黑"/>
-              </a:rPr>
-              <a:t>2.2 亿老人、跌倒首位死因、现有方案全失效。</a:t>
-            </a:r>
-          </a:p>
-        </p:txBody>
-      </p:sp>
-      <p:sp>
-        <p:nvSpPr>
-          <p:cNvPr id="13" name="TextBox 12"/>
-          <p:cNvSpPr txBox="1"/>
-          <p:nvPr/>
-        </p:nvSpPr>
-        <p:spPr>
-          <a:xfrm>
-            <a:off x="6766560" y="2834640"/>
-            <a:ext cx="4572000" cy="274320"/>
-          </a:xfrm>
-          <a:prstGeom prst="rect">
-            <a:avLst/>
-          </a:prstGeom>
-          <a:noFill/>
-        </p:spPr>
-        <p:txBody>
-          <a:bodyPr wrap="square" anchor="t" lIns="0" rIns="0" tIns="0" bIns="0">
-            <a:spAutoFit/>
-          </a:bodyPr>
-          <a:lstStyle/>
-          <a:p>
-            <a:pPr algn="l"/>
-            <a:r>
-              <a:rPr sz="1000" b="1" i="0" spc="100">
-                <a:solidFill>
-                  <a:srgbClr val="002FA7"/>
-                </a:solidFill>
-                <a:latin typeface="Arial"/>
-                <a:ea typeface="微软雅黑"/>
-              </a:rPr>
-              <a:t>02</a:t>
-            </a:r>
-          </a:p>
-        </p:txBody>
-      </p:sp>
-      <p:sp>
-        <p:nvSpPr>
-          <p:cNvPr id="14" name="TextBox 13"/>
-          <p:cNvSpPr txBox="1"/>
-          <p:nvPr/>
-        </p:nvSpPr>
-        <p:spPr>
-          <a:xfrm>
-            <a:off x="6766560" y="3127248"/>
-            <a:ext cx="4572000" cy="365760"/>
-          </a:xfrm>
-          <a:prstGeom prst="rect">
-            <a:avLst/>
-          </a:prstGeom>
-          <a:noFill/>
-        </p:spPr>
-        <p:txBody>
-          <a:bodyPr wrap="square" anchor="t" lIns="0" rIns="0" tIns="0" bIns="0">
-            <a:spAutoFit/>
-          </a:bodyPr>
-          <a:lstStyle/>
-          <a:p>
-            <a:pPr algn="l"/>
-            <a:r>
-              <a:rPr sz="1500" b="0" i="0">
-                <a:solidFill>
-                  <a:srgbClr val="0A0A0A"/>
-                </a:solidFill>
-                <a:latin typeface="Arial"/>
-                <a:ea typeface="微软雅黑"/>
-              </a:rPr>
-              <a:t>壁垒足够深</a:t>
-            </a:r>
-          </a:p>
-        </p:txBody>
-      </p:sp>
-      <p:sp>
-        <p:nvSpPr>
-          <p:cNvPr id="15" name="TextBox 14"/>
-          <p:cNvSpPr txBox="1"/>
-          <p:nvPr/>
-        </p:nvSpPr>
-        <p:spPr>
-          <a:xfrm>
-            <a:off x="6766560" y="3547872"/>
-            <a:ext cx="4572000" cy="457200"/>
-          </a:xfrm>
-          <a:prstGeom prst="rect">
-            <a:avLst/>
-          </a:prstGeom>
-          <a:noFill/>
-        </p:spPr>
-        <p:txBody>
-          <a:bodyPr wrap="square" anchor="t" lIns="0" rIns="0" tIns="0" bIns="0">
-            <a:spAutoFit/>
-          </a:bodyPr>
-          <a:lstStyle/>
-          <a:p>
-            <a:pPr algn="l">
-              <a:lnSpc>
-                <a:spcPct val="130000"/>
-              </a:lnSpc>
-            </a:pPr>
-            <a:r>
-              <a:rPr sz="950" b="0" i="0">
-                <a:solidFill>
-                  <a:srgbClr val="444444"/>
-                </a:solidFill>
-                <a:latin typeface="Arial"/>
-                <a:ea typeface="微软雅黑"/>
-              </a:rPr>
-              <a:t>自研点云 + 数据飞轮，越用越准、短期难复制。</a:t>
-            </a:r>
-          </a:p>
-        </p:txBody>
-      </p:sp>
-      <p:sp>
-        <p:nvSpPr>
-          <p:cNvPr id="16" name="TextBox 15"/>
-          <p:cNvSpPr txBox="1"/>
-          <p:nvPr/>
-        </p:nvSpPr>
-        <p:spPr>
-          <a:xfrm>
-            <a:off x="6766560" y="4206240"/>
-            <a:ext cx="4572000" cy="274320"/>
-          </a:xfrm>
-          <a:prstGeom prst="rect">
-            <a:avLst/>
-          </a:prstGeom>
-          <a:noFill/>
-        </p:spPr>
-        <p:txBody>
-          <a:bodyPr wrap="square" anchor="t" lIns="0" rIns="0" tIns="0" bIns="0">
-            <a:spAutoFit/>
-          </a:bodyPr>
-          <a:lstStyle/>
-          <a:p>
-            <a:pPr algn="l"/>
-            <a:r>
-              <a:rPr sz="1000" b="1" i="0" spc="100">
-                <a:solidFill>
-                  <a:srgbClr val="002FA7"/>
-                </a:solidFill>
-                <a:latin typeface="Arial"/>
-                <a:ea typeface="微软雅黑"/>
-              </a:rPr>
-              <a:t>03</a:t>
-            </a:r>
-          </a:p>
-        </p:txBody>
-      </p:sp>
-      <p:sp>
-        <p:nvSpPr>
-          <p:cNvPr id="17" name="TextBox 16"/>
-          <p:cNvSpPr txBox="1"/>
-          <p:nvPr/>
-        </p:nvSpPr>
-        <p:spPr>
-          <a:xfrm>
-            <a:off x="6766560" y="4498848"/>
-            <a:ext cx="4572000" cy="365760"/>
-          </a:xfrm>
-          <a:prstGeom prst="rect">
-            <a:avLst/>
-          </a:prstGeom>
-          <a:noFill/>
-        </p:spPr>
-        <p:txBody>
-          <a:bodyPr wrap="square" anchor="t" lIns="0" rIns="0" tIns="0" bIns="0">
-            <a:spAutoFit/>
-          </a:bodyPr>
-          <a:lstStyle/>
-          <a:p>
-            <a:pPr algn="l"/>
-            <a:r>
-              <a:rPr sz="1500" b="0" i="0">
-                <a:solidFill>
-                  <a:srgbClr val="0A0A0A"/>
-                </a:solidFill>
-                <a:latin typeface="Arial"/>
-                <a:ea typeface="微软雅黑"/>
-              </a:rPr>
-              <a:t>路径足够清</a:t>
-            </a:r>
-          </a:p>
-        </p:txBody>
-      </p:sp>
-      <p:sp>
-        <p:nvSpPr>
-          <p:cNvPr id="18" name="TextBox 17"/>
-          <p:cNvSpPr txBox="1"/>
-          <p:nvPr/>
-        </p:nvSpPr>
-        <p:spPr>
-          <a:xfrm>
-            <a:off x="6766560" y="4919472"/>
-            <a:ext cx="4572000" cy="457200"/>
-          </a:xfrm>
-          <a:prstGeom prst="rect">
-            <a:avLst/>
-          </a:prstGeom>
-          <a:noFill/>
-        </p:spPr>
-        <p:txBody>
-          <a:bodyPr wrap="square" anchor="t" lIns="0" rIns="0" tIns="0" bIns="0">
-            <a:spAutoFit/>
-          </a:bodyPr>
-          <a:lstStyle/>
-          <a:p>
-            <a:pPr algn="l">
-              <a:lnSpc>
-                <a:spcPct val="130000"/>
-              </a:lnSpc>
-            </a:pPr>
-            <a:r>
-              <a:rPr sz="950" b="0" i="0">
-                <a:solidFill>
-                  <a:srgbClr val="444444"/>
-                </a:solidFill>
-                <a:latin typeface="Arial"/>
-                <a:ea typeface="微软雅黑"/>
-              </a:rPr>
-              <a:t>买断获客 → 降本转正 → 数据变现，自洽可信。</a:t>
-            </a:r>
-          </a:p>
-        </p:txBody>
-      </p:sp>
-      <p:sp>
-        <p:nvSpPr>
-          <p:cNvPr id="19" name="TextBox 18"/>
-          <p:cNvSpPr txBox="1"/>
-          <p:nvPr/>
-        </p:nvSpPr>
-        <p:spPr>
-          <a:xfrm>
-            <a:off x="6766560" y="6309360"/>
-            <a:ext cx="4846320" cy="274320"/>
-          </a:xfrm>
-          <a:prstGeom prst="rect">
-            <a:avLst/>
-          </a:prstGeom>
-          <a:noFill/>
-        </p:spPr>
-        <p:txBody>
-          <a:bodyPr wrap="square" anchor="t" lIns="0" rIns="0" tIns="0" bIns="0">
-            <a:spAutoFit/>
-          </a:bodyPr>
-          <a:lstStyle/>
-          <a:p>
-            <a:pPr algn="r"/>
-            <a:r>
-              <a:rPr sz="900" b="0" i="0" spc="100">
-                <a:solidFill>
-                  <a:srgbClr val="737373"/>
-                </a:solidFill>
-                <a:latin typeface="Arial"/>
-                <a:ea typeface="微软雅黑"/>
-              </a:rPr>
-              <a:t>家安 housafe · 天使轮 800 万</a:t>
-            </a:r>
-          </a:p>
-        </p:txBody>
-      </p:sp>
-    </p:spTree>
-  </p:cSld>
-  <p:clrMapOvr>
-    <a:masterClrMapping/>
-  </p:clrMapOvr>
-</p:sld>
-</file>
-
-<file path=ppt/slides/slide5.xml><?xml version="1.0" encoding="utf-8"?>
-<p:sld xmlns:a="http://schemas.openxmlformats.org/drawingml/2006/main" xmlns:p="http://schemas.openxmlformats.org/presentationml/2006/main" xmlns:r="http://schemas.openxmlformats.org/officeDocument/2006/relationships">
-  <p:cSld>
-    <p:spTree>
-      <p:nvGrpSpPr>
-        <p:cNvPr id="1" name=""/>
-        <p:cNvGrpSpPr/>
-        <p:nvPr/>
-      </p:nvGrpSpPr>
-      <p:grpSpPr/>
-      <p:sp>
-        <p:nvSpPr>
-          <p:cNvPr id="2" name="Rectangle 1"/>
+              <a:t>视觉规范</a:t>
+            </a:r>
+            <a:endParaRPr sz="2600" b="0" i="0">
+              <a:solidFill>
+                <a:srgbClr val="0A0A0A"/>
+              </a:solidFill>
+              <a:latin typeface="Arial" panose="020B0604020202090204"/>
+              <a:ea typeface="微软雅黑"/>
+            </a:endParaRPr>
+          </a:p>
+        </p:txBody>
+      </p:sp>
+      <p:sp>
+        <p:nvSpPr>
+          <p:cNvPr id="6" name="Rectangle 5"/>
           <p:cNvSpPr/>
           <p:nvPr/>
         </p:nvSpPr>
         <p:spPr>
           <a:xfrm>
-            <a:off x="0" y="0"/>
-            <a:ext cx="12191695" cy="6858000"/>
+            <a:off x="502920" y="1828800"/>
+            <a:ext cx="1645920" cy="914400"/>
           </a:xfrm>
           <a:prstGeom prst="rect">
             <a:avLst/>
           </a:prstGeom>
           <a:solidFill>
-            <a:srgbClr val="FAFAF8"/>
+            <a:srgbClr val="002FA7"/>
           </a:solidFill>
-          <a:ln>
-            <a:noFill/>
+          <a:ln w="6350">
+            <a:solidFill>
+              <a:srgbClr val="D4D4D2"/>
+            </a:solidFill>
           </a:ln>
           <a:effectLst/>
         </p:spPr>
@@ -5377,14 +5814,14 @@
       </p:sp>
       <p:sp>
         <p:nvSpPr>
-          <p:cNvPr id="3" name="TextBox 2"/>
+          <p:cNvPr id="7" name="TextBox 6"/>
           <p:cNvSpPr txBox="1"/>
           <p:nvPr/>
         </p:nvSpPr>
         <p:spPr>
           <a:xfrm>
-            <a:off x="502920" y="329184"/>
-            <a:ext cx="7315200" cy="274320"/>
+            <a:off x="502920" y="2834640"/>
+            <a:ext cx="1737360" cy="274320"/>
           </a:xfrm>
           <a:prstGeom prst="rect">
             <a:avLst/>
@@ -5392,35 +5829,42 @@
           <a:noFill/>
         </p:spPr>
         <p:txBody>
-          <a:bodyPr wrap="square" anchor="t" lIns="0" rIns="0" tIns="0" bIns="0">
+          <a:bodyPr wrap="square" lIns="0" tIns="0" rIns="0" bIns="0" anchor="t">
             <a:spAutoFit/>
           </a:bodyPr>
           <a:lstStyle/>
           <a:p>
             <a:pPr algn="l"/>
             <a:r>
-              <a:rPr sz="950" b="0" i="0" spc="120">
-                <a:solidFill>
-                  <a:srgbClr val="737373"/>
-                </a:solidFill>
-                <a:latin typeface="Arial"/>
+              <a:rPr sz="950" b="0" i="0">
+                <a:solidFill>
+                  <a:srgbClr val="0A0A0A"/>
+                </a:solidFill>
+                <a:latin typeface="Arial" panose="020B0604020202090204"/>
                 <a:ea typeface="微软雅黑"/>
               </a:rPr>
-              <a:t>样式规范 · STYLE GUIDE</a:t>
-            </a:r>
-          </a:p>
-        </p:txBody>
-      </p:sp>
-      <p:sp>
-        <p:nvSpPr>
-          <p:cNvPr id="4" name="TextBox 3"/>
+              <a:t>IKB 克莱因蓝</a:t>
+            </a:r>
+            <a:endParaRPr sz="950" b="0" i="0">
+              <a:solidFill>
+                <a:srgbClr val="0A0A0A"/>
+              </a:solidFill>
+              <a:latin typeface="Arial" panose="020B0604020202090204"/>
+              <a:ea typeface="微软雅黑"/>
+            </a:endParaRPr>
+          </a:p>
+        </p:txBody>
+      </p:sp>
+      <p:sp>
+        <p:nvSpPr>
+          <p:cNvPr id="8" name="TextBox 7"/>
           <p:cNvSpPr txBox="1"/>
           <p:nvPr/>
         </p:nvSpPr>
         <p:spPr>
           <a:xfrm>
-            <a:off x="5790895" y="329184"/>
-            <a:ext cx="5897880" cy="274320"/>
+            <a:off x="502920" y="3063240"/>
+            <a:ext cx="1737360" cy="274320"/>
           </a:xfrm>
           <a:prstGeom prst="rect">
             <a:avLst/>
@@ -5428,81 +5872,48 @@
           <a:noFill/>
         </p:spPr>
         <p:txBody>
-          <a:bodyPr wrap="square" anchor="t" lIns="0" rIns="0" tIns="0" bIns="0">
+          <a:bodyPr wrap="square" lIns="0" tIns="0" rIns="0" bIns="0" anchor="t">
             <a:spAutoFit/>
           </a:bodyPr>
           <a:lstStyle/>
           <a:p>
-            <a:pPr algn="r"/>
-            <a:r>
-              <a:rPr sz="950" b="0" i="0" spc="120">
+            <a:pPr algn="l"/>
+            <a:r>
+              <a:rPr sz="850" b="0" i="0">
                 <a:solidFill>
                   <a:srgbClr val="737373"/>
                 </a:solidFill>
-                <a:latin typeface="Arial"/>
+                <a:latin typeface="Arial" panose="020B0604020202090204"/>
                 <a:ea typeface="微软雅黑"/>
               </a:rPr>
-              <a:t>MASTER / SPEC</a:t>
-            </a:r>
-          </a:p>
-        </p:txBody>
-      </p:sp>
-      <p:sp>
-        <p:nvSpPr>
-          <p:cNvPr id="5" name="TextBox 4"/>
-          <p:cNvSpPr txBox="1"/>
-          <p:nvPr/>
-        </p:nvSpPr>
-        <p:spPr>
-          <a:xfrm>
-            <a:off x="502920" y="822960"/>
-            <a:ext cx="11155680" cy="1143000"/>
-          </a:xfrm>
-          <a:prstGeom prst="rect">
-            <a:avLst/>
-          </a:prstGeom>
-          <a:noFill/>
-        </p:spPr>
-        <p:txBody>
-          <a:bodyPr wrap="square" anchor="t" lIns="0" rIns="0" tIns="0" bIns="0">
-            <a:spAutoFit/>
-          </a:bodyPr>
-          <a:lstStyle/>
-          <a:p>
-            <a:pPr>
-              <a:lnSpc>
-                <a:spcPct val="105000"/>
-              </a:lnSpc>
-            </a:pPr>
-            <a:r>
-              <a:rPr sz="2600" b="0" i="0">
-                <a:solidFill>
-                  <a:srgbClr val="0A0A0A"/>
-                </a:solidFill>
-                <a:latin typeface="Arial"/>
-                <a:ea typeface="微软雅黑"/>
-              </a:rPr>
-              <a:t>视觉规范</a:t>
-            </a:r>
-          </a:p>
-        </p:txBody>
-      </p:sp>
-      <p:sp>
-        <p:nvSpPr>
-          <p:cNvPr id="6" name="Rectangle 5"/>
+              <a:t>#002FA7</a:t>
+            </a:r>
+            <a:endParaRPr sz="850" b="0" i="0">
+              <a:solidFill>
+                <a:srgbClr val="737373"/>
+              </a:solidFill>
+              <a:latin typeface="Arial" panose="020B0604020202090204"/>
+              <a:ea typeface="微软雅黑"/>
+            </a:endParaRPr>
+          </a:p>
+        </p:txBody>
+      </p:sp>
+      <p:sp>
+        <p:nvSpPr>
+          <p:cNvPr id="9" name="Rectangle 8"/>
           <p:cNvSpPr/>
           <p:nvPr/>
         </p:nvSpPr>
         <p:spPr>
           <a:xfrm>
-            <a:off x="502920" y="1828800"/>
+            <a:off x="2386584" y="1828800"/>
             <a:ext cx="1645920" cy="914400"/>
           </a:xfrm>
           <a:prstGeom prst="rect">
             <a:avLst/>
           </a:prstGeom>
           <a:solidFill>
-            <a:srgbClr val="002FA7"/>
+            <a:srgbClr val="0A0A0A"/>
           </a:solidFill>
           <a:ln w="6350">
             <a:solidFill>
@@ -5535,13 +5946,13 @@
       </p:sp>
       <p:sp>
         <p:nvSpPr>
-          <p:cNvPr id="7" name="TextBox 6"/>
+          <p:cNvPr id="10" name="TextBox 9"/>
           <p:cNvSpPr txBox="1"/>
           <p:nvPr/>
         </p:nvSpPr>
         <p:spPr>
           <a:xfrm>
-            <a:off x="502920" y="2834640"/>
+            <a:off x="2386584" y="2834640"/>
             <a:ext cx="1737360" cy="274320"/>
           </a:xfrm>
           <a:prstGeom prst="rect">
@@ -5550,7 +5961,7 @@
           <a:noFill/>
         </p:spPr>
         <p:txBody>
-          <a:bodyPr wrap="square" anchor="t" lIns="0" rIns="0" tIns="0" bIns="0">
+          <a:bodyPr wrap="square" lIns="0" tIns="0" rIns="0" bIns="0" anchor="t">
             <a:spAutoFit/>
           </a:bodyPr>
           <a:lstStyle/>
@@ -5561,23 +5972,30 @@
                 <a:solidFill>
                   <a:srgbClr val="0A0A0A"/>
                 </a:solidFill>
-                <a:latin typeface="Arial"/>
+                <a:latin typeface="Arial" panose="020B0604020202090204"/>
                 <a:ea typeface="微软雅黑"/>
               </a:rPr>
-              <a:t>IKB 克莱因蓝</a:t>
-            </a:r>
-          </a:p>
-        </p:txBody>
-      </p:sp>
-      <p:sp>
-        <p:nvSpPr>
-          <p:cNvPr id="8" name="TextBox 7"/>
+              <a:t>墨黑 Ink</a:t>
+            </a:r>
+            <a:endParaRPr sz="950" b="0" i="0">
+              <a:solidFill>
+                <a:srgbClr val="0A0A0A"/>
+              </a:solidFill>
+              <a:latin typeface="Arial" panose="020B0604020202090204"/>
+              <a:ea typeface="微软雅黑"/>
+            </a:endParaRPr>
+          </a:p>
+        </p:txBody>
+      </p:sp>
+      <p:sp>
+        <p:nvSpPr>
+          <p:cNvPr id="11" name="TextBox 10"/>
           <p:cNvSpPr txBox="1"/>
           <p:nvPr/>
         </p:nvSpPr>
         <p:spPr>
           <a:xfrm>
-            <a:off x="502920" y="3063240"/>
+            <a:off x="2386584" y="3063240"/>
             <a:ext cx="1737360" cy="274320"/>
           </a:xfrm>
           <a:prstGeom prst="rect">
@@ -5586,7 +6004,7 @@
           <a:noFill/>
         </p:spPr>
         <p:txBody>
-          <a:bodyPr wrap="square" anchor="t" lIns="0" rIns="0" tIns="0" bIns="0">
+          <a:bodyPr wrap="square" lIns="0" tIns="0" rIns="0" bIns="0" anchor="t">
             <a:spAutoFit/>
           </a:bodyPr>
           <a:lstStyle/>
@@ -5597,30 +6015,37 @@
                 <a:solidFill>
                   <a:srgbClr val="737373"/>
                 </a:solidFill>
-                <a:latin typeface="Arial"/>
+                <a:latin typeface="Arial" panose="020B0604020202090204"/>
                 <a:ea typeface="微软雅黑"/>
               </a:rPr>
-              <a:t>#002FA7</a:t>
-            </a:r>
-          </a:p>
-        </p:txBody>
-      </p:sp>
-      <p:sp>
-        <p:nvSpPr>
-          <p:cNvPr id="9" name="Rectangle 8"/>
+              <a:t>#0A0A0A</a:t>
+            </a:r>
+            <a:endParaRPr sz="850" b="0" i="0">
+              <a:solidFill>
+                <a:srgbClr val="737373"/>
+              </a:solidFill>
+              <a:latin typeface="Arial" panose="020B0604020202090204"/>
+              <a:ea typeface="微软雅黑"/>
+            </a:endParaRPr>
+          </a:p>
+        </p:txBody>
+      </p:sp>
+      <p:sp>
+        <p:nvSpPr>
+          <p:cNvPr id="12" name="Rectangle 11"/>
           <p:cNvSpPr/>
           <p:nvPr/>
         </p:nvSpPr>
         <p:spPr>
           <a:xfrm>
-            <a:off x="2386584" y="1828800"/>
+            <a:off x="4270248" y="1828800"/>
             <a:ext cx="1645920" cy="914400"/>
           </a:xfrm>
           <a:prstGeom prst="rect">
             <a:avLst/>
           </a:prstGeom>
           <a:solidFill>
-            <a:srgbClr val="0A0A0A"/>
+            <a:srgbClr val="FAFAF8"/>
           </a:solidFill>
           <a:ln w="6350">
             <a:solidFill>
@@ -5653,13 +6078,13 @@
       </p:sp>
       <p:sp>
         <p:nvSpPr>
-          <p:cNvPr id="10" name="TextBox 9"/>
+          <p:cNvPr id="13" name="TextBox 12"/>
           <p:cNvSpPr txBox="1"/>
           <p:nvPr/>
         </p:nvSpPr>
         <p:spPr>
           <a:xfrm>
-            <a:off x="2386584" y="2834640"/>
+            <a:off x="4270248" y="2834640"/>
             <a:ext cx="1737360" cy="274320"/>
           </a:xfrm>
           <a:prstGeom prst="rect">
@@ -5668,7 +6093,7 @@
           <a:noFill/>
         </p:spPr>
         <p:txBody>
-          <a:bodyPr wrap="square" anchor="t" lIns="0" rIns="0" tIns="0" bIns="0">
+          <a:bodyPr wrap="square" lIns="0" tIns="0" rIns="0" bIns="0" anchor="t">
             <a:spAutoFit/>
           </a:bodyPr>
           <a:lstStyle/>
@@ -5679,23 +6104,30 @@
                 <a:solidFill>
                   <a:srgbClr val="0A0A0A"/>
                 </a:solidFill>
-                <a:latin typeface="Arial"/>
+                <a:latin typeface="Arial" panose="020B0604020202090204"/>
                 <a:ea typeface="微软雅黑"/>
               </a:rPr>
-              <a:t>墨黑 Ink</a:t>
-            </a:r>
-          </a:p>
-        </p:txBody>
-      </p:sp>
-      <p:sp>
-        <p:nvSpPr>
-          <p:cNvPr id="11" name="TextBox 10"/>
+              <a:t>纸白 Paper</a:t>
+            </a:r>
+            <a:endParaRPr sz="950" b="0" i="0">
+              <a:solidFill>
+                <a:srgbClr val="0A0A0A"/>
+              </a:solidFill>
+              <a:latin typeface="Arial" panose="020B0604020202090204"/>
+              <a:ea typeface="微软雅黑"/>
+            </a:endParaRPr>
+          </a:p>
+        </p:txBody>
+      </p:sp>
+      <p:sp>
+        <p:nvSpPr>
+          <p:cNvPr id="14" name="TextBox 13"/>
           <p:cNvSpPr txBox="1"/>
           <p:nvPr/>
         </p:nvSpPr>
         <p:spPr>
           <a:xfrm>
-            <a:off x="2386584" y="3063240"/>
+            <a:off x="4270248" y="3063240"/>
             <a:ext cx="1737360" cy="274320"/>
           </a:xfrm>
           <a:prstGeom prst="rect">
@@ -5704,7 +6136,7 @@
           <a:noFill/>
         </p:spPr>
         <p:txBody>
-          <a:bodyPr wrap="square" anchor="t" lIns="0" rIns="0" tIns="0" bIns="0">
+          <a:bodyPr wrap="square" lIns="0" tIns="0" rIns="0" bIns="0" anchor="t">
             <a:spAutoFit/>
           </a:bodyPr>
           <a:lstStyle/>
@@ -5715,30 +6147,37 @@
                 <a:solidFill>
                   <a:srgbClr val="737373"/>
                 </a:solidFill>
-                <a:latin typeface="Arial"/>
+                <a:latin typeface="Arial" panose="020B0604020202090204"/>
                 <a:ea typeface="微软雅黑"/>
               </a:rPr>
-              <a:t>#0A0A0A</a:t>
-            </a:r>
-          </a:p>
-        </p:txBody>
-      </p:sp>
-      <p:sp>
-        <p:nvSpPr>
-          <p:cNvPr id="12" name="Rectangle 11"/>
+              <a:t>#FAFAF8</a:t>
+            </a:r>
+            <a:endParaRPr sz="850" b="0" i="0">
+              <a:solidFill>
+                <a:srgbClr val="737373"/>
+              </a:solidFill>
+              <a:latin typeface="Arial" panose="020B0604020202090204"/>
+              <a:ea typeface="微软雅黑"/>
+            </a:endParaRPr>
+          </a:p>
+        </p:txBody>
+      </p:sp>
+      <p:sp>
+        <p:nvSpPr>
+          <p:cNvPr id="15" name="Rectangle 14"/>
           <p:cNvSpPr/>
           <p:nvPr/>
         </p:nvSpPr>
         <p:spPr>
           <a:xfrm>
-            <a:off x="4270248" y="1828800"/>
+            <a:off x="6153912" y="1828800"/>
             <a:ext cx="1645920" cy="914400"/>
           </a:xfrm>
           <a:prstGeom prst="rect">
             <a:avLst/>
           </a:prstGeom>
           <a:solidFill>
-            <a:srgbClr val="FAFAF8"/>
+            <a:srgbClr val="F5F5F4"/>
           </a:solidFill>
           <a:ln w="6350">
             <a:solidFill>
@@ -5771,13 +6210,13 @@
       </p:sp>
       <p:sp>
         <p:nvSpPr>
-          <p:cNvPr id="13" name="TextBox 12"/>
+          <p:cNvPr id="16" name="TextBox 15"/>
           <p:cNvSpPr txBox="1"/>
           <p:nvPr/>
         </p:nvSpPr>
         <p:spPr>
           <a:xfrm>
-            <a:off x="4270248" y="2834640"/>
+            <a:off x="6153912" y="2834640"/>
             <a:ext cx="1737360" cy="274320"/>
           </a:xfrm>
           <a:prstGeom prst="rect">
@@ -5786,7 +6225,7 @@
           <a:noFill/>
         </p:spPr>
         <p:txBody>
-          <a:bodyPr wrap="square" anchor="t" lIns="0" rIns="0" tIns="0" bIns="0">
+          <a:bodyPr wrap="square" lIns="0" tIns="0" rIns="0" bIns="0" anchor="t">
             <a:spAutoFit/>
           </a:bodyPr>
           <a:lstStyle/>
@@ -5797,23 +6236,30 @@
                 <a:solidFill>
                   <a:srgbClr val="0A0A0A"/>
                 </a:solidFill>
-                <a:latin typeface="Arial"/>
+                <a:latin typeface="Arial" panose="020B0604020202090204"/>
                 <a:ea typeface="微软雅黑"/>
               </a:rPr>
-              <a:t>纸白 Paper</a:t>
-            </a:r>
-          </a:p>
-        </p:txBody>
-      </p:sp>
-      <p:sp>
-        <p:nvSpPr>
-          <p:cNvPr id="14" name="TextBox 13"/>
+              <a:t>浅灰卡</a:t>
+            </a:r>
+            <a:endParaRPr sz="950" b="0" i="0">
+              <a:solidFill>
+                <a:srgbClr val="0A0A0A"/>
+              </a:solidFill>
+              <a:latin typeface="Arial" panose="020B0604020202090204"/>
+              <a:ea typeface="微软雅黑"/>
+            </a:endParaRPr>
+          </a:p>
+        </p:txBody>
+      </p:sp>
+      <p:sp>
+        <p:nvSpPr>
+          <p:cNvPr id="17" name="TextBox 16"/>
           <p:cNvSpPr txBox="1"/>
           <p:nvPr/>
         </p:nvSpPr>
         <p:spPr>
           <a:xfrm>
-            <a:off x="4270248" y="3063240"/>
+            <a:off x="6153912" y="3063240"/>
             <a:ext cx="1737360" cy="274320"/>
           </a:xfrm>
           <a:prstGeom prst="rect">
@@ -5822,7 +6268,7 @@
           <a:noFill/>
         </p:spPr>
         <p:txBody>
-          <a:bodyPr wrap="square" anchor="t" lIns="0" rIns="0" tIns="0" bIns="0">
+          <a:bodyPr wrap="square" lIns="0" tIns="0" rIns="0" bIns="0" anchor="t">
             <a:spAutoFit/>
           </a:bodyPr>
           <a:lstStyle/>
@@ -5833,30 +6279,37 @@
                 <a:solidFill>
                   <a:srgbClr val="737373"/>
                 </a:solidFill>
-                <a:latin typeface="Arial"/>
+                <a:latin typeface="Arial" panose="020B0604020202090204"/>
                 <a:ea typeface="微软雅黑"/>
               </a:rPr>
-              <a:t>#FAFAF8</a:t>
-            </a:r>
-          </a:p>
-        </p:txBody>
-      </p:sp>
-      <p:sp>
-        <p:nvSpPr>
-          <p:cNvPr id="15" name="Rectangle 14"/>
+              <a:t>#F5F5F4</a:t>
+            </a:r>
+            <a:endParaRPr sz="850" b="0" i="0">
+              <a:solidFill>
+                <a:srgbClr val="737373"/>
+              </a:solidFill>
+              <a:latin typeface="Arial" panose="020B0604020202090204"/>
+              <a:ea typeface="微软雅黑"/>
+            </a:endParaRPr>
+          </a:p>
+        </p:txBody>
+      </p:sp>
+      <p:sp>
+        <p:nvSpPr>
+          <p:cNvPr id="18" name="Rectangle 17"/>
           <p:cNvSpPr/>
           <p:nvPr/>
         </p:nvSpPr>
         <p:spPr>
           <a:xfrm>
-            <a:off x="6153912" y="1828800"/>
+            <a:off x="8037576" y="1828800"/>
             <a:ext cx="1645920" cy="914400"/>
           </a:xfrm>
           <a:prstGeom prst="rect">
             <a:avLst/>
           </a:prstGeom>
           <a:solidFill>
-            <a:srgbClr val="F5F5F4"/>
+            <a:srgbClr val="D4D4D2"/>
           </a:solidFill>
           <a:ln w="6350">
             <a:solidFill>
@@ -5889,13 +6342,13 @@
       </p:sp>
       <p:sp>
         <p:nvSpPr>
-          <p:cNvPr id="16" name="TextBox 15"/>
+          <p:cNvPr id="19" name="TextBox 18"/>
           <p:cNvSpPr txBox="1"/>
           <p:nvPr/>
         </p:nvSpPr>
         <p:spPr>
           <a:xfrm>
-            <a:off x="6153912" y="2834640"/>
+            <a:off x="8037576" y="2834640"/>
             <a:ext cx="1737360" cy="274320"/>
           </a:xfrm>
           <a:prstGeom prst="rect">
@@ -5904,7 +6357,7 @@
           <a:noFill/>
         </p:spPr>
         <p:txBody>
-          <a:bodyPr wrap="square" anchor="t" lIns="0" rIns="0" tIns="0" bIns="0">
+          <a:bodyPr wrap="square" lIns="0" tIns="0" rIns="0" bIns="0" anchor="t">
             <a:spAutoFit/>
           </a:bodyPr>
           <a:lstStyle/>
@@ -5915,23 +6368,30 @@
                 <a:solidFill>
                   <a:srgbClr val="0A0A0A"/>
                 </a:solidFill>
-                <a:latin typeface="Arial"/>
+                <a:latin typeface="Arial" panose="020B0604020202090204"/>
                 <a:ea typeface="微软雅黑"/>
               </a:rPr>
-              <a:t>浅灰卡</a:t>
-            </a:r>
-          </a:p>
-        </p:txBody>
-      </p:sp>
-      <p:sp>
-        <p:nvSpPr>
-          <p:cNvPr id="17" name="TextBox 16"/>
+              <a:t>中灰线</a:t>
+            </a:r>
+            <a:endParaRPr sz="950" b="0" i="0">
+              <a:solidFill>
+                <a:srgbClr val="0A0A0A"/>
+              </a:solidFill>
+              <a:latin typeface="Arial" panose="020B0604020202090204"/>
+              <a:ea typeface="微软雅黑"/>
+            </a:endParaRPr>
+          </a:p>
+        </p:txBody>
+      </p:sp>
+      <p:sp>
+        <p:nvSpPr>
+          <p:cNvPr id="20" name="TextBox 19"/>
           <p:cNvSpPr txBox="1"/>
           <p:nvPr/>
         </p:nvSpPr>
         <p:spPr>
           <a:xfrm>
-            <a:off x="6153912" y="3063240"/>
+            <a:off x="8037576" y="3063240"/>
             <a:ext cx="1737360" cy="274320"/>
           </a:xfrm>
           <a:prstGeom prst="rect">
@@ -5940,7 +6400,7 @@
           <a:noFill/>
         </p:spPr>
         <p:txBody>
-          <a:bodyPr wrap="square" anchor="t" lIns="0" rIns="0" tIns="0" bIns="0">
+          <a:bodyPr wrap="square" lIns="0" tIns="0" rIns="0" bIns="0" anchor="t">
             <a:spAutoFit/>
           </a:bodyPr>
           <a:lstStyle/>
@@ -5951,30 +6411,37 @@
                 <a:solidFill>
                   <a:srgbClr val="737373"/>
                 </a:solidFill>
-                <a:latin typeface="Arial"/>
+                <a:latin typeface="Arial" panose="020B0604020202090204"/>
                 <a:ea typeface="微软雅黑"/>
               </a:rPr>
-              <a:t>#F5F5F4</a:t>
-            </a:r>
-          </a:p>
-        </p:txBody>
-      </p:sp>
-      <p:sp>
-        <p:nvSpPr>
-          <p:cNvPr id="18" name="Rectangle 17"/>
+              <a:t>#D4D4D2</a:t>
+            </a:r>
+            <a:endParaRPr sz="850" b="0" i="0">
+              <a:solidFill>
+                <a:srgbClr val="737373"/>
+              </a:solidFill>
+              <a:latin typeface="Arial" panose="020B0604020202090204"/>
+              <a:ea typeface="微软雅黑"/>
+            </a:endParaRPr>
+          </a:p>
+        </p:txBody>
+      </p:sp>
+      <p:sp>
+        <p:nvSpPr>
+          <p:cNvPr id="21" name="Rectangle 20"/>
           <p:cNvSpPr/>
           <p:nvPr/>
         </p:nvSpPr>
         <p:spPr>
           <a:xfrm>
-            <a:off x="8037576" y="1828800"/>
+            <a:off x="9921240" y="1828800"/>
             <a:ext cx="1645920" cy="914400"/>
           </a:xfrm>
           <a:prstGeom prst="rect">
             <a:avLst/>
           </a:prstGeom>
           <a:solidFill>
-            <a:srgbClr val="D4D4D2"/>
+            <a:srgbClr val="737373"/>
           </a:solidFill>
           <a:ln w="6350">
             <a:solidFill>
@@ -6007,13 +6474,13 @@
       </p:sp>
       <p:sp>
         <p:nvSpPr>
-          <p:cNvPr id="19" name="TextBox 18"/>
+          <p:cNvPr id="22" name="TextBox 21"/>
           <p:cNvSpPr txBox="1"/>
           <p:nvPr/>
         </p:nvSpPr>
         <p:spPr>
           <a:xfrm>
-            <a:off x="8037576" y="2834640"/>
+            <a:off x="9921240" y="2834640"/>
             <a:ext cx="1737360" cy="274320"/>
           </a:xfrm>
           <a:prstGeom prst="rect">
@@ -6022,7 +6489,7 @@
           <a:noFill/>
         </p:spPr>
         <p:txBody>
-          <a:bodyPr wrap="square" anchor="t" lIns="0" rIns="0" tIns="0" bIns="0">
+          <a:bodyPr wrap="square" lIns="0" tIns="0" rIns="0" bIns="0" anchor="t">
             <a:spAutoFit/>
           </a:bodyPr>
           <a:lstStyle/>
@@ -6033,129 +6500,18 @@
                 <a:solidFill>
                   <a:srgbClr val="0A0A0A"/>
                 </a:solidFill>
-                <a:latin typeface="Arial"/>
-                <a:ea typeface="微软雅黑"/>
-              </a:rPr>
-              <a:t>中灰线</a:t>
-            </a:r>
-          </a:p>
-        </p:txBody>
-      </p:sp>
-      <p:sp>
-        <p:nvSpPr>
-          <p:cNvPr id="20" name="TextBox 19"/>
-          <p:cNvSpPr txBox="1"/>
-          <p:nvPr/>
-        </p:nvSpPr>
-        <p:spPr>
-          <a:xfrm>
-            <a:off x="8037576" y="3063240"/>
-            <a:ext cx="1737360" cy="274320"/>
-          </a:xfrm>
-          <a:prstGeom prst="rect">
-            <a:avLst/>
-          </a:prstGeom>
-          <a:noFill/>
-        </p:spPr>
-        <p:txBody>
-          <a:bodyPr wrap="square" anchor="t" lIns="0" rIns="0" tIns="0" bIns="0">
-            <a:spAutoFit/>
-          </a:bodyPr>
-          <a:lstStyle/>
-          <a:p>
-            <a:pPr algn="l"/>
-            <a:r>
-              <a:rPr sz="850" b="0" i="0">
-                <a:solidFill>
-                  <a:srgbClr val="737373"/>
-                </a:solidFill>
-                <a:latin typeface="Arial"/>
-                <a:ea typeface="微软雅黑"/>
-              </a:rPr>
-              <a:t>#D4D4D2</a:t>
-            </a:r>
-          </a:p>
-        </p:txBody>
-      </p:sp>
-      <p:sp>
-        <p:nvSpPr>
-          <p:cNvPr id="21" name="Rectangle 20"/>
-          <p:cNvSpPr/>
-          <p:nvPr/>
-        </p:nvSpPr>
-        <p:spPr>
-          <a:xfrm>
-            <a:off x="9921240" y="1828800"/>
-            <a:ext cx="1645920" cy="914400"/>
-          </a:xfrm>
-          <a:prstGeom prst="rect">
-            <a:avLst/>
-          </a:prstGeom>
-          <a:solidFill>
-            <a:srgbClr val="737373"/>
-          </a:solidFill>
-          <a:ln w="6350">
-            <a:solidFill>
-              <a:srgbClr val="D4D4D2"/>
-            </a:solidFill>
-          </a:ln>
-          <a:effectLst/>
-        </p:spPr>
-        <p:style>
-          <a:lnRef idx="1">
-            <a:schemeClr val="accent1"/>
-          </a:lnRef>
-          <a:fillRef idx="3">
-            <a:schemeClr val="accent1"/>
-          </a:fillRef>
-          <a:effectRef idx="2">
-            <a:schemeClr val="accent1"/>
-          </a:effectRef>
-          <a:fontRef idx="minor">
-            <a:schemeClr val="lt1"/>
-          </a:fontRef>
-        </p:style>
-        <p:txBody>
-          <a:bodyPr rtlCol="0" anchor="ctr"/>
-          <a:lstStyle/>
-          <a:p>
-            <a:pPr algn="ctr"/>
-          </a:p>
-        </p:txBody>
-      </p:sp>
-      <p:sp>
-        <p:nvSpPr>
-          <p:cNvPr id="22" name="TextBox 21"/>
-          <p:cNvSpPr txBox="1"/>
-          <p:nvPr/>
-        </p:nvSpPr>
-        <p:spPr>
-          <a:xfrm>
-            <a:off x="9921240" y="2834640"/>
-            <a:ext cx="1737360" cy="274320"/>
-          </a:xfrm>
-          <a:prstGeom prst="rect">
-            <a:avLst/>
-          </a:prstGeom>
-          <a:noFill/>
-        </p:spPr>
-        <p:txBody>
-          <a:bodyPr wrap="square" anchor="t" lIns="0" rIns="0" tIns="0" bIns="0">
-            <a:spAutoFit/>
-          </a:bodyPr>
-          <a:lstStyle/>
-          <a:p>
-            <a:pPr algn="l"/>
-            <a:r>
-              <a:rPr sz="950" b="0" i="0">
-                <a:solidFill>
-                  <a:srgbClr val="0A0A0A"/>
-                </a:solidFill>
-                <a:latin typeface="Arial"/>
+                <a:latin typeface="Arial" panose="020B0604020202090204"/>
                 <a:ea typeface="微软雅黑"/>
               </a:rPr>
               <a:t>辅助灰</a:t>
             </a:r>
+            <a:endParaRPr sz="950" b="0" i="0">
+              <a:solidFill>
+                <a:srgbClr val="0A0A0A"/>
+              </a:solidFill>
+              <a:latin typeface="Arial" panose="020B0604020202090204"/>
+              <a:ea typeface="微软雅黑"/>
+            </a:endParaRPr>
           </a:p>
         </p:txBody>
       </p:sp>
@@ -6176,7 +6532,7 @@
           <a:noFill/>
         </p:spPr>
         <p:txBody>
-          <a:bodyPr wrap="square" anchor="t" lIns="0" rIns="0" tIns="0" bIns="0">
+          <a:bodyPr wrap="square" lIns="0" tIns="0" rIns="0" bIns="0" anchor="t">
             <a:spAutoFit/>
           </a:bodyPr>
           <a:lstStyle/>
@@ -6187,11 +6543,18 @@
                 <a:solidFill>
                   <a:srgbClr val="737373"/>
                 </a:solidFill>
-                <a:latin typeface="Arial"/>
+                <a:latin typeface="Arial" panose="020B0604020202090204"/>
                 <a:ea typeface="微软雅黑"/>
               </a:rPr>
               <a:t>#737373</a:t>
             </a:r>
+            <a:endParaRPr sz="850" b="0" i="0">
+              <a:solidFill>
+                <a:srgbClr val="737373"/>
+              </a:solidFill>
+              <a:latin typeface="Arial" panose="020B0604020202090204"/>
+              <a:ea typeface="微软雅黑"/>
+            </a:endParaRPr>
           </a:p>
         </p:txBody>
       </p:sp>
@@ -6212,7 +6575,7 @@
           <a:noFill/>
         </p:spPr>
         <p:txBody>
-          <a:bodyPr wrap="square" anchor="t" lIns="0" rIns="0" tIns="0" bIns="0">
+          <a:bodyPr wrap="square" lIns="0" tIns="0" rIns="0" bIns="0" anchor="t">
             <a:spAutoFit/>
           </a:bodyPr>
           <a:lstStyle/>
@@ -6227,11 +6590,18 @@
                 <a:solidFill>
                   <a:srgbClr val="0A0A0A"/>
                 </a:solidFill>
-                <a:latin typeface="Arial"/>
+                <a:latin typeface="Arial" panose="020B0604020202090204"/>
                 <a:ea typeface="微软雅黑"/>
               </a:rPr>
               <a:t>字体：中文 微软雅黑 / 西文·数字 Arial（无衬线）。标题大字号不加粗，模拟瑞士风细体。</a:t>
             </a:r>
+            <a:endParaRPr sz="1100" b="0" i="0">
+              <a:solidFill>
+                <a:srgbClr val="0A0A0A"/>
+              </a:solidFill>
+              <a:latin typeface="Arial" panose="020B0604020202090204"/>
+              <a:ea typeface="微软雅黑"/>
+            </a:endParaRPr>
           </a:p>
         </p:txBody>
       </p:sp>
@@ -6252,7 +6622,7 @@
           <a:noFill/>
         </p:spPr>
         <p:txBody>
-          <a:bodyPr wrap="square" anchor="t" lIns="0" rIns="0" tIns="0" bIns="0">
+          <a:bodyPr wrap="square" lIns="0" tIns="0" rIns="0" bIns="0" anchor="t">
             <a:spAutoFit/>
           </a:bodyPr>
           <a:lstStyle/>
@@ -6267,11 +6637,18 @@
                 <a:solidFill>
                   <a:srgbClr val="444444"/>
                 </a:solidFill>
-                <a:latin typeface="Arial"/>
+                <a:latin typeface="Arial" panose="020B0604020202090204"/>
                 <a:ea typeface="微软雅黑"/>
               </a:rPr>
               <a:t>字号阶梯：封面 40pt · 章节标题 24–27pt · KPI 数字 22–30pt · 正文 10–11pt · 脚注/标签 9pt</a:t>
             </a:r>
+            <a:endParaRPr sz="1050" b="0" i="0">
+              <a:solidFill>
+                <a:srgbClr val="444444"/>
+              </a:solidFill>
+              <a:latin typeface="Arial" panose="020B0604020202090204"/>
+              <a:ea typeface="微软雅黑"/>
+            </a:endParaRPr>
           </a:p>
         </p:txBody>
       </p:sp>
@@ -6292,7 +6669,7 @@
           <a:noFill/>
         </p:spPr>
         <p:txBody>
-          <a:bodyPr wrap="square" anchor="t" lIns="0" rIns="0" tIns="0" bIns="0">
+          <a:bodyPr wrap="square" lIns="0" tIns="0" rIns="0" bIns="0" anchor="t">
             <a:spAutoFit/>
           </a:bodyPr>
           <a:lstStyle/>
@@ -6307,11 +6684,18 @@
                 <a:solidFill>
                   <a:srgbClr val="444444"/>
                 </a:solidFill>
-                <a:latin typeface="Arial"/>
+                <a:latin typeface="Arial" panose="020B0604020202090204"/>
                 <a:ea typeface="微软雅黑"/>
               </a:rPr>
               <a:t>版式：直角纯色块、发丝线分隔、单一 IKB 强调色、大幅留白、深/浅/蓝三种页底交替。</a:t>
             </a:r>
+            <a:endParaRPr sz="1050" b="0" i="0">
+              <a:solidFill>
+                <a:srgbClr val="444444"/>
+              </a:solidFill>
+              <a:latin typeface="Arial" panose="020B0604020202090204"/>
+              <a:ea typeface="微软雅黑"/>
+            </a:endParaRPr>
           </a:p>
         </p:txBody>
       </p:sp>
@@ -6332,7 +6716,7 @@
           <a:noFill/>
         </p:spPr>
         <p:txBody>
-          <a:bodyPr wrap="square" anchor="t" lIns="0" rIns="0" tIns="0" bIns="0">
+          <a:bodyPr wrap="square" lIns="0" tIns="0" rIns="0" bIns="0" anchor="t">
             <a:spAutoFit/>
           </a:bodyPr>
           <a:lstStyle/>
@@ -6347,11 +6731,18 @@
                 <a:solidFill>
                   <a:srgbClr val="737373"/>
                 </a:solidFill>
-                <a:latin typeface="Arial"/>
+                <a:latin typeface="Arial" panose="020B0604020202090204"/>
                 <a:ea typeface="微软雅黑"/>
               </a:rPr>
               <a:t>明暗节奏：封面(蓝) 浅 深 浅 浅 深 浅 深 浅 浅 深 浅 浅 深 收尾(蓝)</a:t>
             </a:r>
+            <a:endParaRPr sz="1000" b="0" i="0">
+              <a:solidFill>
+                <a:srgbClr val="737373"/>
+              </a:solidFill>
+              <a:latin typeface="Arial" panose="020B0604020202090204"/>
+              <a:ea typeface="微软雅黑"/>
+            </a:endParaRPr>
           </a:p>
         </p:txBody>
       </p:sp>
@@ -6679,6 +7070,10 @@
       </a:style>
     </a:lnDef>
   </a:objectDefaults>
-  <a:extraClrSchemeLst/>
+  <a:extLst>
+    <a:ext uri="{05A4C25C-085E-4340-85A3-A5531E510DB2}">
+      <thm15:themeFamily xmlns:thm15="http://schemas.microsoft.com/office/thememl/2012/main" name="Office Theme" id="{62F939B6-93AF-4DB8-9C6B-D6C7DFDC589F}" vid="{4A3C46E8-61CC-4603-A589-7422A47A8E4A}"/>
+    </a:ext>
+  </a:extLst>
 </a:theme>
 </file>